--- a/Servallab_QC_Technical.pptx
+++ b/Servallab_QC_Technical.pptx
@@ -25,6 +25,9 @@
     <p:sldId id="273" r:id="rId24"/>
     <p:sldId id="274" r:id="rId25"/>
     <p:sldId id="275" r:id="rId26"/>
+    <p:sldId id="276" r:id="rId27"/>
+    <p:sldId id="277" r:id="rId28"/>
+    <p:sldId id="278" r:id="rId29"/>
   </p:sldIdLst>
   <p:sldSz cx="12188952" cy="6858000" type="screen4x3"/>
   <p:notesSz cx="6858000" cy="9144000"/>
@@ -17320,7 +17323,7 @@
         <p:spPr>
           <a:xfrm>
             <a:off x="0" y="0"/>
-            <a:ext cx="12188952" cy="73152"/>
+            <a:ext cx="12188952" cy="54864"/>
           </a:xfrm>
           <a:prstGeom prst="rect">
             <a:avLst/>
@@ -17356,14 +17359,1649 @@
       </p:sp>
       <p:sp>
         <p:nvSpPr>
-          <p:cNvPr id="3" name="Rectangle 2"/>
+          <p:cNvPr id="3" name="TextBox 2"/>
+          <p:cNvSpPr txBox="1"/>
+          <p:nvPr/>
+        </p:nvSpPr>
+        <p:spPr>
+          <a:xfrm>
+            <a:off x="457200" y="146304"/>
+            <a:ext cx="9144000" cy="548640"/>
+          </a:xfrm>
+          <a:prstGeom prst="rect">
+            <a:avLst/>
+          </a:prstGeom>
+          <a:noFill/>
+        </p:spPr>
+        <p:txBody>
+          <a:bodyPr wrap="square">
+            <a:spAutoFit/>
+          </a:bodyPr>
+          <a:lstStyle/>
+          <a:p>
+            <a:pPr algn="l"/>
+            <a:r>
+              <a:rPr sz="2600" b="1" i="0">
+                <a:solidFill>
+                  <a:srgbClr val="FFFFFF"/>
+                </a:solidFill>
+                <a:latin typeface="Segoe UI"/>
+              </a:rPr>
+              <a:t>Manager Dashboard</a:t>
+            </a:r>
+          </a:p>
+        </p:txBody>
+      </p:sp>
+      <p:sp>
+        <p:nvSpPr>
+          <p:cNvPr id="4" name="TextBox 3"/>
+          <p:cNvSpPr txBox="1"/>
+          <p:nvPr/>
+        </p:nvSpPr>
+        <p:spPr>
+          <a:xfrm>
+            <a:off x="457200" y="640080"/>
+            <a:ext cx="10972800" cy="365760"/>
+          </a:xfrm>
+          <a:prstGeom prst="rect">
+            <a:avLst/>
+          </a:prstGeom>
+          <a:noFill/>
+        </p:spPr>
+        <p:txBody>
+          <a:bodyPr wrap="square">
+            <a:spAutoFit/>
+          </a:bodyPr>
+          <a:lstStyle/>
+          <a:p>
+            <a:pPr algn="l"/>
+            <a:r>
+              <a:rPr sz="1200" b="0" i="0">
+                <a:solidFill>
+                  <a:srgbClr val="8896A8"/>
+                </a:solidFill>
+                <a:latin typeface="Segoe UI"/>
+              </a:rPr>
+              <a:t>Streamlit subdomain app — dashboard.servallab.com  ·  separate from QC engine</a:t>
+            </a:r>
+          </a:p>
+        </p:txBody>
+      </p:sp>
+      <p:sp>
+        <p:nvSpPr>
+          <p:cNvPr id="5" name="Rectangle 4"/>
           <p:cNvSpPr/>
           <p:nvPr/>
         </p:nvSpPr>
         <p:spPr>
           <a:xfrm>
-            <a:off x="0" y="6784848"/>
-            <a:ext cx="12188952" cy="73152"/>
+            <a:off x="457200" y="950976"/>
+            <a:ext cx="11274552" cy="18288"/>
+          </a:xfrm>
+          <a:prstGeom prst="rect">
+            <a:avLst/>
+          </a:prstGeom>
+          <a:solidFill>
+            <a:srgbClr val="161A22"/>
+          </a:solidFill>
+          <a:ln>
+            <a:noFill/>
+          </a:ln>
+        </p:spPr>
+        <p:style>
+          <a:lnRef idx="1">
+            <a:schemeClr val="accent1"/>
+          </a:lnRef>
+          <a:fillRef idx="3">
+            <a:schemeClr val="accent1"/>
+          </a:fillRef>
+          <a:effectRef idx="2">
+            <a:schemeClr val="accent1"/>
+          </a:effectRef>
+          <a:fontRef idx="minor">
+            <a:schemeClr val="lt1"/>
+          </a:fontRef>
+        </p:style>
+        <p:txBody>
+          <a:bodyPr rtlCol="0" anchor="ctr"/>
+          <a:lstStyle/>
+          <a:p>
+            <a:pPr algn="ctr"/>
+          </a:p>
+        </p:txBody>
+      </p:sp>
+      <p:sp>
+        <p:nvSpPr>
+          <p:cNvPr id="6" name="Rectangle 5"/>
+          <p:cNvSpPr/>
+          <p:nvPr/>
+        </p:nvSpPr>
+        <p:spPr>
+          <a:xfrm>
+            <a:off x="457200" y="1051560"/>
+            <a:ext cx="5394960" cy="5349240"/>
+          </a:xfrm>
+          <a:prstGeom prst="rect">
+            <a:avLst/>
+          </a:prstGeom>
+          <a:solidFill>
+            <a:srgbClr val="161A22"/>
+          </a:solidFill>
+          <a:ln>
+            <a:noFill/>
+          </a:ln>
+        </p:spPr>
+        <p:style>
+          <a:lnRef idx="1">
+            <a:schemeClr val="accent1"/>
+          </a:lnRef>
+          <a:fillRef idx="3">
+            <a:schemeClr val="accent1"/>
+          </a:fillRef>
+          <a:effectRef idx="2">
+            <a:schemeClr val="accent1"/>
+          </a:effectRef>
+          <a:fontRef idx="minor">
+            <a:schemeClr val="lt1"/>
+          </a:fontRef>
+        </p:style>
+        <p:txBody>
+          <a:bodyPr rtlCol="0" anchor="ctr"/>
+          <a:lstStyle/>
+          <a:p>
+            <a:pPr algn="ctr"/>
+          </a:p>
+        </p:txBody>
+      </p:sp>
+      <p:sp>
+        <p:nvSpPr>
+          <p:cNvPr id="7" name="Rectangle 6"/>
+          <p:cNvSpPr/>
+          <p:nvPr/>
+        </p:nvSpPr>
+        <p:spPr>
+          <a:xfrm>
+            <a:off x="457200" y="1051560"/>
+            <a:ext cx="5394960" cy="54864"/>
+          </a:xfrm>
+          <a:prstGeom prst="rect">
+            <a:avLst/>
+          </a:prstGeom>
+          <a:solidFill>
+            <a:srgbClr val="4A9EF0"/>
+          </a:solidFill>
+          <a:ln>
+            <a:noFill/>
+          </a:ln>
+        </p:spPr>
+        <p:style>
+          <a:lnRef idx="1">
+            <a:schemeClr val="accent1"/>
+          </a:lnRef>
+          <a:fillRef idx="3">
+            <a:schemeClr val="accent1"/>
+          </a:fillRef>
+          <a:effectRef idx="2">
+            <a:schemeClr val="accent1"/>
+          </a:effectRef>
+          <a:fontRef idx="minor">
+            <a:schemeClr val="lt1"/>
+          </a:fontRef>
+        </p:style>
+        <p:txBody>
+          <a:bodyPr rtlCol="0" anchor="ctr"/>
+          <a:lstStyle/>
+          <a:p>
+            <a:pPr algn="ctr"/>
+          </a:p>
+        </p:txBody>
+      </p:sp>
+      <p:sp>
+        <p:nvSpPr>
+          <p:cNvPr id="8" name="TextBox 7"/>
+          <p:cNvSpPr txBox="1"/>
+          <p:nvPr/>
+        </p:nvSpPr>
+        <p:spPr>
+          <a:xfrm>
+            <a:off x="640080" y="1170432"/>
+            <a:ext cx="5029200" cy="384048"/>
+          </a:xfrm>
+          <a:prstGeom prst="rect">
+            <a:avLst/>
+          </a:prstGeom>
+          <a:noFill/>
+        </p:spPr>
+        <p:txBody>
+          <a:bodyPr wrap="square">
+            <a:spAutoFit/>
+          </a:bodyPr>
+          <a:lstStyle/>
+          <a:p>
+            <a:pPr algn="l"/>
+            <a:r>
+              <a:rPr sz="1400" b="1" i="0">
+                <a:solidFill>
+                  <a:srgbClr val="FFFFFF"/>
+                </a:solidFill>
+                <a:latin typeface="Segoe UI"/>
+              </a:rPr>
+              <a:t>What It Is</a:t>
+            </a:r>
+          </a:p>
+        </p:txBody>
+      </p:sp>
+      <p:sp>
+        <p:nvSpPr>
+          <p:cNvPr id="9" name="TextBox 8"/>
+          <p:cNvSpPr txBox="1"/>
+          <p:nvPr/>
+        </p:nvSpPr>
+        <p:spPr>
+          <a:xfrm>
+            <a:off x="640080" y="1600200"/>
+            <a:ext cx="1828800" cy="320040"/>
+          </a:xfrm>
+          <a:prstGeom prst="rect">
+            <a:avLst/>
+          </a:prstGeom>
+          <a:noFill/>
+        </p:spPr>
+        <p:txBody>
+          <a:bodyPr wrap="square">
+            <a:spAutoFit/>
+          </a:bodyPr>
+          <a:lstStyle/>
+          <a:p>
+            <a:pPr algn="l"/>
+            <a:r>
+              <a:rPr sz="1000" b="1" i="0">
+                <a:solidFill>
+                  <a:srgbClr val="4A9EF0"/>
+                </a:solidFill>
+                <a:latin typeface="Segoe UI"/>
+              </a:rPr>
+              <a:t>Purpose</a:t>
+            </a:r>
+          </a:p>
+        </p:txBody>
+      </p:sp>
+      <p:sp>
+        <p:nvSpPr>
+          <p:cNvPr id="10" name="TextBox 9"/>
+          <p:cNvSpPr txBox="1"/>
+          <p:nvPr/>
+        </p:nvSpPr>
+        <p:spPr>
+          <a:xfrm>
+            <a:off x="2514600" y="1600200"/>
+            <a:ext cx="3246120" cy="713232"/>
+          </a:xfrm>
+          <a:prstGeom prst="rect">
+            <a:avLst/>
+          </a:prstGeom>
+          <a:noFill/>
+        </p:spPr>
+        <p:txBody>
+          <a:bodyPr wrap="square">
+            <a:spAutoFit/>
+          </a:bodyPr>
+          <a:lstStyle/>
+          <a:p>
+            <a:pPr algn="l"/>
+            <a:r>
+              <a:rPr sz="1000" b="0" i="0">
+                <a:solidFill>
+                  <a:srgbClr val="8896A8"/>
+                </a:solidFill>
+                <a:latin typeface="Segoe UI"/>
+              </a:rPr>
+              <a:t>A multi-project operations dashboard for QC managers and supervisors to track survey health across all active studies — not a replacement for the QC engine.</a:t>
+            </a:r>
+          </a:p>
+        </p:txBody>
+      </p:sp>
+      <p:sp>
+        <p:nvSpPr>
+          <p:cNvPr id="11" name="TextBox 10"/>
+          <p:cNvSpPr txBox="1"/>
+          <p:nvPr/>
+        </p:nvSpPr>
+        <p:spPr>
+          <a:xfrm>
+            <a:off x="640080" y="2423160"/>
+            <a:ext cx="1828800" cy="320040"/>
+          </a:xfrm>
+          <a:prstGeom prst="rect">
+            <a:avLst/>
+          </a:prstGeom>
+          <a:noFill/>
+        </p:spPr>
+        <p:txBody>
+          <a:bodyPr wrap="square">
+            <a:spAutoFit/>
+          </a:bodyPr>
+          <a:lstStyle/>
+          <a:p>
+            <a:pPr algn="l"/>
+            <a:r>
+              <a:rPr sz="1000" b="1" i="0">
+                <a:solidFill>
+                  <a:srgbClr val="4A9EF0"/>
+                </a:solidFill>
+                <a:latin typeface="Segoe UI"/>
+              </a:rPr>
+              <a:t>Stack</a:t>
+            </a:r>
+          </a:p>
+        </p:txBody>
+      </p:sp>
+      <p:sp>
+        <p:nvSpPr>
+          <p:cNvPr id="12" name="TextBox 11"/>
+          <p:cNvSpPr txBox="1"/>
+          <p:nvPr/>
+        </p:nvSpPr>
+        <p:spPr>
+          <a:xfrm>
+            <a:off x="2514600" y="2423160"/>
+            <a:ext cx="3246120" cy="713232"/>
+          </a:xfrm>
+          <a:prstGeom prst="rect">
+            <a:avLst/>
+          </a:prstGeom>
+          <a:noFill/>
+        </p:spPr>
+        <p:txBody>
+          <a:bodyPr wrap="square">
+            <a:spAutoFit/>
+          </a:bodyPr>
+          <a:lstStyle/>
+          <a:p>
+            <a:pPr algn="l"/>
+            <a:r>
+              <a:rPr sz="1000" b="0" i="0">
+                <a:solidFill>
+                  <a:srgbClr val="8896A8"/>
+                </a:solidFill>
+                <a:latin typeface="Segoe UI"/>
+              </a:rPr>
+              <a:t>Streamlit Python app. Deployed on Fly.io (dashboard.servallab.com). SQLite database via SQLAlchemy — persists project, interviewer, and QC history records.</a:t>
+            </a:r>
+          </a:p>
+        </p:txBody>
+      </p:sp>
+      <p:sp>
+        <p:nvSpPr>
+          <p:cNvPr id="13" name="TextBox 12"/>
+          <p:cNvSpPr txBox="1"/>
+          <p:nvPr/>
+        </p:nvSpPr>
+        <p:spPr>
+          <a:xfrm>
+            <a:off x="640080" y="3246120"/>
+            <a:ext cx="1828800" cy="320040"/>
+          </a:xfrm>
+          <a:prstGeom prst="rect">
+            <a:avLst/>
+          </a:prstGeom>
+          <a:noFill/>
+        </p:spPr>
+        <p:txBody>
+          <a:bodyPr wrap="square">
+            <a:spAutoFit/>
+          </a:bodyPr>
+          <a:lstStyle/>
+          <a:p>
+            <a:pPr algn="l"/>
+            <a:r>
+              <a:rPr sz="1000" b="1" i="0">
+                <a:solidFill>
+                  <a:srgbClr val="4A9EF0"/>
+                </a:solidFill>
+                <a:latin typeface="Segoe UI"/>
+              </a:rPr>
+              <a:t>Auth</a:t>
+            </a:r>
+          </a:p>
+        </p:txBody>
+      </p:sp>
+      <p:sp>
+        <p:nvSpPr>
+          <p:cNvPr id="14" name="TextBox 13"/>
+          <p:cNvSpPr txBox="1"/>
+          <p:nvPr/>
+        </p:nvSpPr>
+        <p:spPr>
+          <a:xfrm>
+            <a:off x="2514600" y="3246120"/>
+            <a:ext cx="3246120" cy="713232"/>
+          </a:xfrm>
+          <a:prstGeom prst="rect">
+            <a:avLst/>
+          </a:prstGeom>
+          <a:noFill/>
+        </p:spPr>
+        <p:txBody>
+          <a:bodyPr wrap="square">
+            <a:spAutoFit/>
+          </a:bodyPr>
+          <a:lstStyle/>
+          <a:p>
+            <a:pPr algn="l"/>
+            <a:r>
+              <a:rPr sz="1000" b="0" i="0">
+                <a:solidFill>
+                  <a:srgbClr val="8896A8"/>
+                </a:solidFill>
+                <a:latin typeface="Segoe UI"/>
+              </a:rPr>
+              <a:t>JWT-based login. Roles: admin, manager, viewer. Admin creates users; managers own projects; viewers can read but not write.</a:t>
+            </a:r>
+          </a:p>
+        </p:txBody>
+      </p:sp>
+      <p:sp>
+        <p:nvSpPr>
+          <p:cNvPr id="15" name="TextBox 14"/>
+          <p:cNvSpPr txBox="1"/>
+          <p:nvPr/>
+        </p:nvSpPr>
+        <p:spPr>
+          <a:xfrm>
+            <a:off x="640080" y="4069080"/>
+            <a:ext cx="1828800" cy="320040"/>
+          </a:xfrm>
+          <a:prstGeom prst="rect">
+            <a:avLst/>
+          </a:prstGeom>
+          <a:noFill/>
+        </p:spPr>
+        <p:txBody>
+          <a:bodyPr wrap="square">
+            <a:spAutoFit/>
+          </a:bodyPr>
+          <a:lstStyle/>
+          <a:p>
+            <a:pPr algn="l"/>
+            <a:r>
+              <a:rPr sz="1000" b="1" i="0">
+                <a:solidFill>
+                  <a:srgbClr val="4A9EF0"/>
+                </a:solidFill>
+                <a:latin typeface="Segoe UI"/>
+              </a:rPr>
+              <a:t>Relation to QC engine</a:t>
+            </a:r>
+          </a:p>
+        </p:txBody>
+      </p:sp>
+      <p:sp>
+        <p:nvSpPr>
+          <p:cNvPr id="16" name="TextBox 15"/>
+          <p:cNvSpPr txBox="1"/>
+          <p:nvPr/>
+        </p:nvSpPr>
+        <p:spPr>
+          <a:xfrm>
+            <a:off x="2514600" y="4069080"/>
+            <a:ext cx="3246120" cy="713232"/>
+          </a:xfrm>
+          <a:prstGeom prst="rect">
+            <a:avLst/>
+          </a:prstGeom>
+          <a:noFill/>
+        </p:spPr>
+        <p:txBody>
+          <a:bodyPr wrap="square">
+            <a:spAutoFit/>
+          </a:bodyPr>
+          <a:lstStyle/>
+          <a:p>
+            <a:pPr algn="l"/>
+            <a:r>
+              <a:rPr sz="1000" b="0" i="0">
+                <a:solidFill>
+                  <a:srgbClr val="8896A8"/>
+                </a:solidFill>
+                <a:latin typeface="Segoe UI"/>
+              </a:rPr>
+              <a:t>QC results saved from the React engine can be pushed here via 'Save to project'. The dashboard tracks trends over multiple waves, not individual file runs.</a:t>
+            </a:r>
+          </a:p>
+        </p:txBody>
+      </p:sp>
+      <p:sp>
+        <p:nvSpPr>
+          <p:cNvPr id="17" name="TextBox 16"/>
+          <p:cNvSpPr txBox="1"/>
+          <p:nvPr/>
+        </p:nvSpPr>
+        <p:spPr>
+          <a:xfrm>
+            <a:off x="640080" y="4892040"/>
+            <a:ext cx="1828800" cy="320040"/>
+          </a:xfrm>
+          <a:prstGeom prst="rect">
+            <a:avLst/>
+          </a:prstGeom>
+          <a:noFill/>
+        </p:spPr>
+        <p:txBody>
+          <a:bodyPr wrap="square">
+            <a:spAutoFit/>
+          </a:bodyPr>
+          <a:lstStyle/>
+          <a:p>
+            <a:pPr algn="l"/>
+            <a:r>
+              <a:rPr sz="1000" b="1" i="0">
+                <a:solidFill>
+                  <a:srgbClr val="4A9EF0"/>
+                </a:solidFill>
+                <a:latin typeface="Segoe UI"/>
+              </a:rPr>
+              <a:t>Default credentials</a:t>
+            </a:r>
+          </a:p>
+        </p:txBody>
+      </p:sp>
+      <p:sp>
+        <p:nvSpPr>
+          <p:cNvPr id="18" name="TextBox 17"/>
+          <p:cNvSpPr txBox="1"/>
+          <p:nvPr/>
+        </p:nvSpPr>
+        <p:spPr>
+          <a:xfrm>
+            <a:off x="2514600" y="4892040"/>
+            <a:ext cx="3246120" cy="713232"/>
+          </a:xfrm>
+          <a:prstGeom prst="rect">
+            <a:avLst/>
+          </a:prstGeom>
+          <a:noFill/>
+        </p:spPr>
+        <p:txBody>
+          <a:bodyPr wrap="square">
+            <a:spAutoFit/>
+          </a:bodyPr>
+          <a:lstStyle/>
+          <a:p>
+            <a:pPr algn="l"/>
+            <a:r>
+              <a:rPr sz="1000" b="0" i="0">
+                <a:solidFill>
+                  <a:srgbClr val="8896A8"/>
+                </a:solidFill>
+                <a:latin typeface="Segoe UI"/>
+              </a:rPr>
+              <a:t>First-run: admin@servallab.com / admin1234. Change immediately in production.</a:t>
+            </a:r>
+          </a:p>
+        </p:txBody>
+      </p:sp>
+      <p:sp>
+        <p:nvSpPr>
+          <p:cNvPr id="19" name="Rectangle 18"/>
+          <p:cNvSpPr/>
+          <p:nvPr/>
+        </p:nvSpPr>
+        <p:spPr>
+          <a:xfrm>
+            <a:off x="6217920" y="1051560"/>
+            <a:ext cx="5394960" cy="5349240"/>
+          </a:xfrm>
+          <a:prstGeom prst="rect">
+            <a:avLst/>
+          </a:prstGeom>
+          <a:solidFill>
+            <a:srgbClr val="161A22"/>
+          </a:solidFill>
+          <a:ln>
+            <a:noFill/>
+          </a:ln>
+        </p:spPr>
+        <p:style>
+          <a:lnRef idx="1">
+            <a:schemeClr val="accent1"/>
+          </a:lnRef>
+          <a:fillRef idx="3">
+            <a:schemeClr val="accent1"/>
+          </a:fillRef>
+          <a:effectRef idx="2">
+            <a:schemeClr val="accent1"/>
+          </a:effectRef>
+          <a:fontRef idx="minor">
+            <a:schemeClr val="lt1"/>
+          </a:fontRef>
+        </p:style>
+        <p:txBody>
+          <a:bodyPr rtlCol="0" anchor="ctr"/>
+          <a:lstStyle/>
+          <a:p>
+            <a:pPr algn="ctr"/>
+          </a:p>
+        </p:txBody>
+      </p:sp>
+      <p:sp>
+        <p:nvSpPr>
+          <p:cNvPr id="20" name="Rectangle 19"/>
+          <p:cNvSpPr/>
+          <p:nvPr/>
+        </p:nvSpPr>
+        <p:spPr>
+          <a:xfrm>
+            <a:off x="6217920" y="1051560"/>
+            <a:ext cx="5394960" cy="54864"/>
+          </a:xfrm>
+          <a:prstGeom prst="rect">
+            <a:avLst/>
+          </a:prstGeom>
+          <a:solidFill>
+            <a:srgbClr val="4A9EF0"/>
+          </a:solidFill>
+          <a:ln>
+            <a:noFill/>
+          </a:ln>
+        </p:spPr>
+        <p:style>
+          <a:lnRef idx="1">
+            <a:schemeClr val="accent1"/>
+          </a:lnRef>
+          <a:fillRef idx="3">
+            <a:schemeClr val="accent1"/>
+          </a:fillRef>
+          <a:effectRef idx="2">
+            <a:schemeClr val="accent1"/>
+          </a:effectRef>
+          <a:fontRef idx="minor">
+            <a:schemeClr val="lt1"/>
+          </a:fontRef>
+        </p:style>
+        <p:txBody>
+          <a:bodyPr rtlCol="0" anchor="ctr"/>
+          <a:lstStyle/>
+          <a:p>
+            <a:pPr algn="ctr"/>
+          </a:p>
+        </p:txBody>
+      </p:sp>
+      <p:sp>
+        <p:nvSpPr>
+          <p:cNvPr id="21" name="TextBox 20"/>
+          <p:cNvSpPr txBox="1"/>
+          <p:nvPr/>
+        </p:nvSpPr>
+        <p:spPr>
+          <a:xfrm>
+            <a:off x="6400800" y="1170432"/>
+            <a:ext cx="5029200" cy="384048"/>
+          </a:xfrm>
+          <a:prstGeom prst="rect">
+            <a:avLst/>
+          </a:prstGeom>
+          <a:noFill/>
+        </p:spPr>
+        <p:txBody>
+          <a:bodyPr wrap="square">
+            <a:spAutoFit/>
+          </a:bodyPr>
+          <a:lstStyle/>
+          <a:p>
+            <a:pPr algn="l"/>
+            <a:r>
+              <a:rPr sz="1400" b="1" i="0">
+                <a:solidFill>
+                  <a:srgbClr val="FFFFFF"/>
+                </a:solidFill>
+                <a:latin typeface="Segoe UI"/>
+              </a:rPr>
+              <a:t>Dashboard Pages</a:t>
+            </a:r>
+          </a:p>
+        </p:txBody>
+      </p:sp>
+      <p:sp>
+        <p:nvSpPr>
+          <p:cNvPr id="22" name="Rectangle 21"/>
+          <p:cNvSpPr/>
+          <p:nvPr/>
+        </p:nvSpPr>
+        <p:spPr>
+          <a:xfrm>
+            <a:off x="6309360" y="1600200"/>
+            <a:ext cx="5120640" cy="566928"/>
+          </a:xfrm>
+          <a:prstGeom prst="rect">
+            <a:avLst/>
+          </a:prstGeom>
+          <a:solidFill>
+            <a:srgbClr val="1E2430"/>
+          </a:solidFill>
+          <a:ln>
+            <a:noFill/>
+          </a:ln>
+        </p:spPr>
+        <p:style>
+          <a:lnRef idx="1">
+            <a:schemeClr val="accent1"/>
+          </a:lnRef>
+          <a:fillRef idx="3">
+            <a:schemeClr val="accent1"/>
+          </a:fillRef>
+          <a:effectRef idx="2">
+            <a:schemeClr val="accent1"/>
+          </a:effectRef>
+          <a:fontRef idx="minor">
+            <a:schemeClr val="lt1"/>
+          </a:fontRef>
+        </p:style>
+        <p:txBody>
+          <a:bodyPr rtlCol="0" anchor="ctr"/>
+          <a:lstStyle/>
+          <a:p>
+            <a:pPr algn="ctr"/>
+          </a:p>
+        </p:txBody>
+      </p:sp>
+      <p:sp>
+        <p:nvSpPr>
+          <p:cNvPr id="23" name="TextBox 22"/>
+          <p:cNvSpPr txBox="1"/>
+          <p:nvPr/>
+        </p:nvSpPr>
+        <p:spPr>
+          <a:xfrm>
+            <a:off x="6446520" y="1655064"/>
+            <a:ext cx="2011680" cy="292608"/>
+          </a:xfrm>
+          <a:prstGeom prst="rect">
+            <a:avLst/>
+          </a:prstGeom>
+          <a:noFill/>
+        </p:spPr>
+        <p:txBody>
+          <a:bodyPr wrap="square">
+            <a:spAutoFit/>
+          </a:bodyPr>
+          <a:lstStyle/>
+          <a:p>
+            <a:pPr algn="l"/>
+            <a:r>
+              <a:rPr sz="1000" b="1" i="0">
+                <a:solidFill>
+                  <a:srgbClr val="FFFFFF"/>
+                </a:solidFill>
+                <a:latin typeface="Segoe UI"/>
+              </a:rPr>
+              <a:t>Project Overview</a:t>
+            </a:r>
+          </a:p>
+        </p:txBody>
+      </p:sp>
+      <p:sp>
+        <p:nvSpPr>
+          <p:cNvPr id="24" name="TextBox 23"/>
+          <p:cNvSpPr txBox="1"/>
+          <p:nvPr/>
+        </p:nvSpPr>
+        <p:spPr>
+          <a:xfrm>
+            <a:off x="8503920" y="1655064"/>
+            <a:ext cx="2788920" cy="457200"/>
+          </a:xfrm>
+          <a:prstGeom prst="rect">
+            <a:avLst/>
+          </a:prstGeom>
+          <a:noFill/>
+        </p:spPr>
+        <p:txBody>
+          <a:bodyPr wrap="square">
+            <a:spAutoFit/>
+          </a:bodyPr>
+          <a:lstStyle/>
+          <a:p>
+            <a:pPr algn="l"/>
+            <a:r>
+              <a:rPr sz="900" b="0" i="0">
+                <a:solidFill>
+                  <a:srgbClr val="8896A8"/>
+                </a:solidFill>
+                <a:latin typeface="Segoe UI"/>
+              </a:rPr>
+              <a:t>KPIs, wave history, open issues per project</a:t>
+            </a:r>
+          </a:p>
+        </p:txBody>
+      </p:sp>
+      <p:sp>
+        <p:nvSpPr>
+          <p:cNvPr id="25" name="Rectangle 24"/>
+          <p:cNvSpPr/>
+          <p:nvPr/>
+        </p:nvSpPr>
+        <p:spPr>
+          <a:xfrm>
+            <a:off x="6309360" y="2240280"/>
+            <a:ext cx="5120640" cy="566928"/>
+          </a:xfrm>
+          <a:prstGeom prst="rect">
+            <a:avLst/>
+          </a:prstGeom>
+          <a:solidFill>
+            <a:srgbClr val="1E2430"/>
+          </a:solidFill>
+          <a:ln>
+            <a:noFill/>
+          </a:ln>
+        </p:spPr>
+        <p:style>
+          <a:lnRef idx="1">
+            <a:schemeClr val="accent1"/>
+          </a:lnRef>
+          <a:fillRef idx="3">
+            <a:schemeClr val="accent1"/>
+          </a:fillRef>
+          <a:effectRef idx="2">
+            <a:schemeClr val="accent1"/>
+          </a:effectRef>
+          <a:fontRef idx="minor">
+            <a:schemeClr val="lt1"/>
+          </a:fontRef>
+        </p:style>
+        <p:txBody>
+          <a:bodyPr rtlCol="0" anchor="ctr"/>
+          <a:lstStyle/>
+          <a:p>
+            <a:pPr algn="ctr"/>
+          </a:p>
+        </p:txBody>
+      </p:sp>
+      <p:sp>
+        <p:nvSpPr>
+          <p:cNvPr id="26" name="TextBox 25"/>
+          <p:cNvSpPr txBox="1"/>
+          <p:nvPr/>
+        </p:nvSpPr>
+        <p:spPr>
+          <a:xfrm>
+            <a:off x="6446520" y="2295144"/>
+            <a:ext cx="2011680" cy="292608"/>
+          </a:xfrm>
+          <a:prstGeom prst="rect">
+            <a:avLst/>
+          </a:prstGeom>
+          <a:noFill/>
+        </p:spPr>
+        <p:txBody>
+          <a:bodyPr wrap="square">
+            <a:spAutoFit/>
+          </a:bodyPr>
+          <a:lstStyle/>
+          <a:p>
+            <a:pPr algn="l"/>
+            <a:r>
+              <a:rPr sz="1000" b="1" i="0">
+                <a:solidFill>
+                  <a:srgbClr val="FFFFFF"/>
+                </a:solidFill>
+                <a:latin typeface="Segoe UI"/>
+              </a:rPr>
+              <a:t>Quality Report</a:t>
+            </a:r>
+          </a:p>
+        </p:txBody>
+      </p:sp>
+      <p:sp>
+        <p:nvSpPr>
+          <p:cNvPr id="27" name="TextBox 26"/>
+          <p:cNvSpPr txBox="1"/>
+          <p:nvPr/>
+        </p:nvSpPr>
+        <p:spPr>
+          <a:xfrm>
+            <a:off x="8503920" y="2295144"/>
+            <a:ext cx="2788920" cy="457200"/>
+          </a:xfrm>
+          <a:prstGeom prst="rect">
+            <a:avLst/>
+          </a:prstGeom>
+          <a:noFill/>
+        </p:spPr>
+        <p:txBody>
+          <a:bodyPr wrap="square">
+            <a:spAutoFit/>
+          </a:bodyPr>
+          <a:lstStyle/>
+          <a:p>
+            <a:pPr algn="l"/>
+            <a:r>
+              <a:rPr sz="900" b="0" i="0">
+                <a:solidFill>
+                  <a:srgbClr val="8896A8"/>
+                </a:solidFill>
+                <a:latin typeface="Segoe UI"/>
+              </a:rPr>
+              <a:t>Flag rate trends by check type across waves</a:t>
+            </a:r>
+          </a:p>
+        </p:txBody>
+      </p:sp>
+      <p:sp>
+        <p:nvSpPr>
+          <p:cNvPr id="28" name="Rectangle 27"/>
+          <p:cNvSpPr/>
+          <p:nvPr/>
+        </p:nvSpPr>
+        <p:spPr>
+          <a:xfrm>
+            <a:off x="6309360" y="2880360"/>
+            <a:ext cx="5120640" cy="566928"/>
+          </a:xfrm>
+          <a:prstGeom prst="rect">
+            <a:avLst/>
+          </a:prstGeom>
+          <a:solidFill>
+            <a:srgbClr val="1E2430"/>
+          </a:solidFill>
+          <a:ln>
+            <a:noFill/>
+          </a:ln>
+        </p:spPr>
+        <p:style>
+          <a:lnRef idx="1">
+            <a:schemeClr val="accent1"/>
+          </a:lnRef>
+          <a:fillRef idx="3">
+            <a:schemeClr val="accent1"/>
+          </a:fillRef>
+          <a:effectRef idx="2">
+            <a:schemeClr val="accent1"/>
+          </a:effectRef>
+          <a:fontRef idx="minor">
+            <a:schemeClr val="lt1"/>
+          </a:fontRef>
+        </p:style>
+        <p:txBody>
+          <a:bodyPr rtlCol="0" anchor="ctr"/>
+          <a:lstStyle/>
+          <a:p>
+            <a:pPr algn="ctr"/>
+          </a:p>
+        </p:txBody>
+      </p:sp>
+      <p:sp>
+        <p:nvSpPr>
+          <p:cNvPr id="29" name="TextBox 28"/>
+          <p:cNvSpPr txBox="1"/>
+          <p:nvPr/>
+        </p:nvSpPr>
+        <p:spPr>
+          <a:xfrm>
+            <a:off x="6446520" y="2935224"/>
+            <a:ext cx="2011680" cy="292608"/>
+          </a:xfrm>
+          <a:prstGeom prst="rect">
+            <a:avLst/>
+          </a:prstGeom>
+          <a:noFill/>
+        </p:spPr>
+        <p:txBody>
+          <a:bodyPr wrap="square">
+            <a:spAutoFit/>
+          </a:bodyPr>
+          <a:lstStyle/>
+          <a:p>
+            <a:pPr algn="l"/>
+            <a:r>
+              <a:rPr sz="1000" b="1" i="0">
+                <a:solidFill>
+                  <a:srgbClr val="FFFFFF"/>
+                </a:solidFill>
+                <a:latin typeface="Segoe UI"/>
+              </a:rPr>
+              <a:t>Performance Report</a:t>
+            </a:r>
+          </a:p>
+        </p:txBody>
+      </p:sp>
+      <p:sp>
+        <p:nvSpPr>
+          <p:cNvPr id="30" name="TextBox 29"/>
+          <p:cNvSpPr txBox="1"/>
+          <p:nvPr/>
+        </p:nvSpPr>
+        <p:spPr>
+          <a:xfrm>
+            <a:off x="8503920" y="2935224"/>
+            <a:ext cx="2788920" cy="457200"/>
+          </a:xfrm>
+          <a:prstGeom prst="rect">
+            <a:avLst/>
+          </a:prstGeom>
+          <a:noFill/>
+        </p:spPr>
+        <p:txBody>
+          <a:bodyPr wrap="square">
+            <a:spAutoFit/>
+          </a:bodyPr>
+          <a:lstStyle/>
+          <a:p>
+            <a:pPr algn="l"/>
+            <a:r>
+              <a:rPr sz="900" b="0" i="0">
+                <a:solidFill>
+                  <a:srgbClr val="8896A8"/>
+                </a:solidFill>
+                <a:latin typeface="Segoe UI"/>
+              </a:rPr>
+              <a:t>Interviewer-level flag rates and risk scores over time</a:t>
+            </a:r>
+          </a:p>
+        </p:txBody>
+      </p:sp>
+      <p:sp>
+        <p:nvSpPr>
+          <p:cNvPr id="31" name="Rectangle 30"/>
+          <p:cNvSpPr/>
+          <p:nvPr/>
+        </p:nvSpPr>
+        <p:spPr>
+          <a:xfrm>
+            <a:off x="6309360" y="3520440"/>
+            <a:ext cx="5120640" cy="566928"/>
+          </a:xfrm>
+          <a:prstGeom prst="rect">
+            <a:avLst/>
+          </a:prstGeom>
+          <a:solidFill>
+            <a:srgbClr val="1E2430"/>
+          </a:solidFill>
+          <a:ln>
+            <a:noFill/>
+          </a:ln>
+        </p:spPr>
+        <p:style>
+          <a:lnRef idx="1">
+            <a:schemeClr val="accent1"/>
+          </a:lnRef>
+          <a:fillRef idx="3">
+            <a:schemeClr val="accent1"/>
+          </a:fillRef>
+          <a:effectRef idx="2">
+            <a:schemeClr val="accent1"/>
+          </a:effectRef>
+          <a:fontRef idx="minor">
+            <a:schemeClr val="lt1"/>
+          </a:fontRef>
+        </p:style>
+        <p:txBody>
+          <a:bodyPr rtlCol="0" anchor="ctr"/>
+          <a:lstStyle/>
+          <a:p>
+            <a:pPr algn="ctr"/>
+          </a:p>
+        </p:txBody>
+      </p:sp>
+      <p:sp>
+        <p:nvSpPr>
+          <p:cNvPr id="32" name="TextBox 31"/>
+          <p:cNvSpPr txBox="1"/>
+          <p:nvPr/>
+        </p:nvSpPr>
+        <p:spPr>
+          <a:xfrm>
+            <a:off x="6446520" y="3575304"/>
+            <a:ext cx="2011680" cy="292608"/>
+          </a:xfrm>
+          <a:prstGeom prst="rect">
+            <a:avLst/>
+          </a:prstGeom>
+          <a:noFill/>
+        </p:spPr>
+        <p:txBody>
+          <a:bodyPr wrap="square">
+            <a:spAutoFit/>
+          </a:bodyPr>
+          <a:lstStyle/>
+          <a:p>
+            <a:pPr algn="l"/>
+            <a:r>
+              <a:rPr sz="1000" b="1" i="0">
+                <a:solidFill>
+                  <a:srgbClr val="FFFFFF"/>
+                </a:solidFill>
+                <a:latin typeface="Segoe UI"/>
+              </a:rPr>
+              <a:t>Backcheck Report</a:t>
+            </a:r>
+          </a:p>
+        </p:txBody>
+      </p:sp>
+      <p:sp>
+        <p:nvSpPr>
+          <p:cNvPr id="33" name="TextBox 32"/>
+          <p:cNvSpPr txBox="1"/>
+          <p:nvPr/>
+        </p:nvSpPr>
+        <p:spPr>
+          <a:xfrm>
+            <a:off x="8503920" y="3575304"/>
+            <a:ext cx="2788920" cy="457200"/>
+          </a:xfrm>
+          <a:prstGeom prst="rect">
+            <a:avLst/>
+          </a:prstGeom>
+          <a:noFill/>
+        </p:spPr>
+        <p:txBody>
+          <a:bodyPr wrap="square">
+            <a:spAutoFit/>
+          </a:bodyPr>
+          <a:lstStyle/>
+          <a:p>
+            <a:pPr algn="l"/>
+            <a:r>
+              <a:rPr sz="900" b="0" i="0">
+                <a:solidFill>
+                  <a:srgbClr val="8896A8"/>
+                </a:solidFill>
+                <a:latin typeface="Segoe UI"/>
+              </a:rPr>
+              <a:t>Backcheck completion rate and error tracking</a:t>
+            </a:r>
+          </a:p>
+        </p:txBody>
+      </p:sp>
+      <p:sp>
+        <p:nvSpPr>
+          <p:cNvPr id="34" name="Rectangle 33"/>
+          <p:cNvSpPr/>
+          <p:nvPr/>
+        </p:nvSpPr>
+        <p:spPr>
+          <a:xfrm>
+            <a:off x="6309360" y="4160520"/>
+            <a:ext cx="5120640" cy="566928"/>
+          </a:xfrm>
+          <a:prstGeom prst="rect">
+            <a:avLst/>
+          </a:prstGeom>
+          <a:solidFill>
+            <a:srgbClr val="1E2430"/>
+          </a:solidFill>
+          <a:ln>
+            <a:noFill/>
+          </a:ln>
+        </p:spPr>
+        <p:style>
+          <a:lnRef idx="1">
+            <a:schemeClr val="accent1"/>
+          </a:lnRef>
+          <a:fillRef idx="3">
+            <a:schemeClr val="accent1"/>
+          </a:fillRef>
+          <a:effectRef idx="2">
+            <a:schemeClr val="accent1"/>
+          </a:effectRef>
+          <a:fontRef idx="minor">
+            <a:schemeClr val="lt1"/>
+          </a:fontRef>
+        </p:style>
+        <p:txBody>
+          <a:bodyPr rtlCol="0" anchor="ctr"/>
+          <a:lstStyle/>
+          <a:p>
+            <a:pPr algn="ctr"/>
+          </a:p>
+        </p:txBody>
+      </p:sp>
+      <p:sp>
+        <p:nvSpPr>
+          <p:cNvPr id="35" name="TextBox 34"/>
+          <p:cNvSpPr txBox="1"/>
+          <p:nvPr/>
+        </p:nvSpPr>
+        <p:spPr>
+          <a:xfrm>
+            <a:off x="6446520" y="4215384"/>
+            <a:ext cx="2011680" cy="292608"/>
+          </a:xfrm>
+          <a:prstGeom prst="rect">
+            <a:avLst/>
+          </a:prstGeom>
+          <a:noFill/>
+        </p:spPr>
+        <p:txBody>
+          <a:bodyPr wrap="square">
+            <a:spAutoFit/>
+          </a:bodyPr>
+          <a:lstStyle/>
+          <a:p>
+            <a:pPr algn="l"/>
+            <a:r>
+              <a:rPr sz="1000" b="1" i="0">
+                <a:solidFill>
+                  <a:srgbClr val="FFFFFF"/>
+                </a:solidFill>
+                <a:latin typeface="Segoe UI"/>
+              </a:rPr>
+              <a:t>Listen-In Report</a:t>
+            </a:r>
+          </a:p>
+        </p:txBody>
+      </p:sp>
+      <p:sp>
+        <p:nvSpPr>
+          <p:cNvPr id="36" name="TextBox 35"/>
+          <p:cNvSpPr txBox="1"/>
+          <p:nvPr/>
+        </p:nvSpPr>
+        <p:spPr>
+          <a:xfrm>
+            <a:off x="8503920" y="4215384"/>
+            <a:ext cx="2788920" cy="457200"/>
+          </a:xfrm>
+          <a:prstGeom prst="rect">
+            <a:avLst/>
+          </a:prstGeom>
+          <a:noFill/>
+        </p:spPr>
+        <p:txBody>
+          <a:bodyPr wrap="square">
+            <a:spAutoFit/>
+          </a:bodyPr>
+          <a:lstStyle/>
+          <a:p>
+            <a:pPr algn="l"/>
+            <a:r>
+              <a:rPr sz="900" b="0" i="0">
+                <a:solidFill>
+                  <a:srgbClr val="8896A8"/>
+                </a:solidFill>
+                <a:latin typeface="Segoe UI"/>
+              </a:rPr>
+              <a:t>Listen-in session pass/fail tracking per supervisor</a:t>
+            </a:r>
+          </a:p>
+        </p:txBody>
+      </p:sp>
+      <p:sp>
+        <p:nvSpPr>
+          <p:cNvPr id="37" name="Rectangle 36"/>
+          <p:cNvSpPr/>
+          <p:nvPr/>
+        </p:nvSpPr>
+        <p:spPr>
+          <a:xfrm>
+            <a:off x="6309360" y="4800600"/>
+            <a:ext cx="5120640" cy="566928"/>
+          </a:xfrm>
+          <a:prstGeom prst="rect">
+            <a:avLst/>
+          </a:prstGeom>
+          <a:solidFill>
+            <a:srgbClr val="1E2430"/>
+          </a:solidFill>
+          <a:ln>
+            <a:noFill/>
+          </a:ln>
+        </p:spPr>
+        <p:style>
+          <a:lnRef idx="1">
+            <a:schemeClr val="accent1"/>
+          </a:lnRef>
+          <a:fillRef idx="3">
+            <a:schemeClr val="accent1"/>
+          </a:fillRef>
+          <a:effectRef idx="2">
+            <a:schemeClr val="accent1"/>
+          </a:effectRef>
+          <a:fontRef idx="minor">
+            <a:schemeClr val="lt1"/>
+          </a:fontRef>
+        </p:style>
+        <p:txBody>
+          <a:bodyPr rtlCol="0" anchor="ctr"/>
+          <a:lstStyle/>
+          <a:p>
+            <a:pPr algn="ctr"/>
+          </a:p>
+        </p:txBody>
+      </p:sp>
+      <p:sp>
+        <p:nvSpPr>
+          <p:cNvPr id="38" name="TextBox 37"/>
+          <p:cNvSpPr txBox="1"/>
+          <p:nvPr/>
+        </p:nvSpPr>
+        <p:spPr>
+          <a:xfrm>
+            <a:off x="6446520" y="4855464"/>
+            <a:ext cx="2011680" cy="292608"/>
+          </a:xfrm>
+          <a:prstGeom prst="rect">
+            <a:avLst/>
+          </a:prstGeom>
+          <a:noFill/>
+        </p:spPr>
+        <p:txBody>
+          <a:bodyPr wrap="square">
+            <a:spAutoFit/>
+          </a:bodyPr>
+          <a:lstStyle/>
+          <a:p>
+            <a:pPr algn="l"/>
+            <a:r>
+              <a:rPr sz="1000" b="1" i="0">
+                <a:solidFill>
+                  <a:srgbClr val="FFFFFF"/>
+                </a:solidFill>
+                <a:latin typeface="Segoe UI"/>
+              </a:rPr>
+              <a:t>Wave Comparison</a:t>
+            </a:r>
+          </a:p>
+        </p:txBody>
+      </p:sp>
+      <p:sp>
+        <p:nvSpPr>
+          <p:cNvPr id="39" name="TextBox 38"/>
+          <p:cNvSpPr txBox="1"/>
+          <p:nvPr/>
+        </p:nvSpPr>
+        <p:spPr>
+          <a:xfrm>
+            <a:off x="8503920" y="4855464"/>
+            <a:ext cx="2788920" cy="457200"/>
+          </a:xfrm>
+          <a:prstGeom prst="rect">
+            <a:avLst/>
+          </a:prstGeom>
+          <a:noFill/>
+        </p:spPr>
+        <p:txBody>
+          <a:bodyPr wrap="square">
+            <a:spAutoFit/>
+          </a:bodyPr>
+          <a:lstStyle/>
+          <a:p>
+            <a:pPr algn="l"/>
+            <a:r>
+              <a:rPr sz="900" b="0" i="0">
+                <a:solidFill>
+                  <a:srgbClr val="8896A8"/>
+                </a:solidFill>
+                <a:latin typeface="Segoe UI"/>
+              </a:rPr>
+              <a:t>Statistical shifts between survey waves</a:t>
+            </a:r>
+          </a:p>
+        </p:txBody>
+      </p:sp>
+      <p:sp>
+        <p:nvSpPr>
+          <p:cNvPr id="40" name="Rectangle 39"/>
+          <p:cNvSpPr/>
+          <p:nvPr/>
+        </p:nvSpPr>
+        <p:spPr>
+          <a:xfrm>
+            <a:off x="6309360" y="5440680"/>
+            <a:ext cx="5120640" cy="566928"/>
+          </a:xfrm>
+          <a:prstGeom prst="rect">
+            <a:avLst/>
+          </a:prstGeom>
+          <a:solidFill>
+            <a:srgbClr val="1E2430"/>
+          </a:solidFill>
+          <a:ln>
+            <a:noFill/>
+          </a:ln>
+        </p:spPr>
+        <p:style>
+          <a:lnRef idx="1">
+            <a:schemeClr val="accent1"/>
+          </a:lnRef>
+          <a:fillRef idx="3">
+            <a:schemeClr val="accent1"/>
+          </a:fillRef>
+          <a:effectRef idx="2">
+            <a:schemeClr val="accent1"/>
+          </a:effectRef>
+          <a:fontRef idx="minor">
+            <a:schemeClr val="lt1"/>
+          </a:fontRef>
+        </p:style>
+        <p:txBody>
+          <a:bodyPr rtlCol="0" anchor="ctr"/>
+          <a:lstStyle/>
+          <a:p>
+            <a:pPr algn="ctr"/>
+          </a:p>
+        </p:txBody>
+      </p:sp>
+      <p:sp>
+        <p:nvSpPr>
+          <p:cNvPr id="41" name="TextBox 40"/>
+          <p:cNvSpPr txBox="1"/>
+          <p:nvPr/>
+        </p:nvSpPr>
+        <p:spPr>
+          <a:xfrm>
+            <a:off x="6446520" y="5495544"/>
+            <a:ext cx="2011680" cy="292608"/>
+          </a:xfrm>
+          <a:prstGeom prst="rect">
+            <a:avLst/>
+          </a:prstGeom>
+          <a:noFill/>
+        </p:spPr>
+        <p:txBody>
+          <a:bodyPr wrap="square">
+            <a:spAutoFit/>
+          </a:bodyPr>
+          <a:lstStyle/>
+          <a:p>
+            <a:pPr algn="l"/>
+            <a:r>
+              <a:rPr sz="1000" b="1" i="0">
+                <a:solidFill>
+                  <a:srgbClr val="FFFFFF"/>
+                </a:solidFill>
+                <a:latin typeface="Segoe UI"/>
+              </a:rPr>
+              <a:t>Cancelled Interviews</a:t>
+            </a:r>
+          </a:p>
+        </p:txBody>
+      </p:sp>
+      <p:sp>
+        <p:nvSpPr>
+          <p:cNvPr id="42" name="TextBox 41"/>
+          <p:cNvSpPr txBox="1"/>
+          <p:nvPr/>
+        </p:nvSpPr>
+        <p:spPr>
+          <a:xfrm>
+            <a:off x="8503920" y="5495544"/>
+            <a:ext cx="2788920" cy="457200"/>
+          </a:xfrm>
+          <a:prstGeom prst="rect">
+            <a:avLst/>
+          </a:prstGeom>
+          <a:noFill/>
+        </p:spPr>
+        <p:txBody>
+          <a:bodyPr wrap="square">
+            <a:spAutoFit/>
+          </a:bodyPr>
+          <a:lstStyle/>
+          <a:p>
+            <a:pPr algn="l"/>
+            <a:r>
+              <a:rPr sz="900" b="0" i="0">
+                <a:solidFill>
+                  <a:srgbClr val="8896A8"/>
+                </a:solidFill>
+                <a:latin typeface="Segoe UI"/>
+              </a:rPr>
+              <a:t>Cancellations logged by reason and interviewer</a:t>
+            </a:r>
+          </a:p>
+        </p:txBody>
+      </p:sp>
+      <p:sp>
+        <p:nvSpPr>
+          <p:cNvPr id="43" name="Rectangle 42"/>
+          <p:cNvSpPr/>
+          <p:nvPr/>
+        </p:nvSpPr>
+        <p:spPr>
+          <a:xfrm>
+            <a:off x="6309360" y="6080760"/>
+            <a:ext cx="5120640" cy="566928"/>
+          </a:xfrm>
+          <a:prstGeom prst="rect">
+            <a:avLst/>
+          </a:prstGeom>
+          <a:solidFill>
+            <a:srgbClr val="1E2430"/>
+          </a:solidFill>
+          <a:ln>
+            <a:noFill/>
+          </a:ln>
+        </p:spPr>
+        <p:style>
+          <a:lnRef idx="1">
+            <a:schemeClr val="accent1"/>
+          </a:lnRef>
+          <a:fillRef idx="3">
+            <a:schemeClr val="accent1"/>
+          </a:fillRef>
+          <a:effectRef idx="2">
+            <a:schemeClr val="accent1"/>
+          </a:effectRef>
+          <a:fontRef idx="minor">
+            <a:schemeClr val="lt1"/>
+          </a:fontRef>
+        </p:style>
+        <p:txBody>
+          <a:bodyPr rtlCol="0" anchor="ctr"/>
+          <a:lstStyle/>
+          <a:p>
+            <a:pPr algn="ctr"/>
+          </a:p>
+        </p:txBody>
+      </p:sp>
+      <p:sp>
+        <p:nvSpPr>
+          <p:cNvPr id="44" name="TextBox 43"/>
+          <p:cNvSpPr txBox="1"/>
+          <p:nvPr/>
+        </p:nvSpPr>
+        <p:spPr>
+          <a:xfrm>
+            <a:off x="6446520" y="6135624"/>
+            <a:ext cx="2011680" cy="292608"/>
+          </a:xfrm>
+          <a:prstGeom prst="rect">
+            <a:avLst/>
+          </a:prstGeom>
+          <a:noFill/>
+        </p:spPr>
+        <p:txBody>
+          <a:bodyPr wrap="square">
+            <a:spAutoFit/>
+          </a:bodyPr>
+          <a:lstStyle/>
+          <a:p>
+            <a:pPr algn="l"/>
+            <a:r>
+              <a:rPr sz="1000" b="1" i="0">
+                <a:solidFill>
+                  <a:srgbClr val="FFFFFF"/>
+                </a:solidFill>
+                <a:latin typeface="Segoe UI"/>
+              </a:rPr>
+              <a:t>Admin</a:t>
+            </a:r>
+          </a:p>
+        </p:txBody>
+      </p:sp>
+      <p:sp>
+        <p:nvSpPr>
+          <p:cNvPr id="45" name="TextBox 44"/>
+          <p:cNvSpPr txBox="1"/>
+          <p:nvPr/>
+        </p:nvSpPr>
+        <p:spPr>
+          <a:xfrm>
+            <a:off x="8503920" y="6135624"/>
+            <a:ext cx="2788920" cy="457200"/>
+          </a:xfrm>
+          <a:prstGeom prst="rect">
+            <a:avLst/>
+          </a:prstGeom>
+          <a:noFill/>
+        </p:spPr>
+        <p:txBody>
+          <a:bodyPr wrap="square">
+            <a:spAutoFit/>
+          </a:bodyPr>
+          <a:lstStyle/>
+          <a:p>
+            <a:pPr algn="l"/>
+            <a:r>
+              <a:rPr sz="900" b="0" i="0">
+                <a:solidFill>
+                  <a:srgbClr val="8896A8"/>
+                </a:solidFill>
+                <a:latin typeface="Segoe UI"/>
+              </a:rPr>
+              <a:t>User management, project creation, role assignment</a:t>
+            </a:r>
+          </a:p>
+        </p:txBody>
+      </p:sp>
+    </p:spTree>
+  </p:cSld>
+  <p:clrMapOvr>
+    <a:masterClrMapping/>
+  </p:clrMapOvr>
+</p:sld>
+</file>
+
+<file path=ppt/slides/slide21.xml><?xml version="1.0" encoding="utf-8"?>
+<p:sld xmlns:a="http://schemas.openxmlformats.org/drawingml/2006/main" xmlns:p="http://schemas.openxmlformats.org/presentationml/2006/main" xmlns:r="http://schemas.openxmlformats.org/officeDocument/2006/relationships">
+  <p:cSld>
+    <p:bg>
+      <p:bgPr>
+        <a:solidFill>
+          <a:srgbClr val="0E1014"/>
+        </a:solidFill>
+        <a:effectLst/>
+      </p:bgPr>
+    </p:bg>
+    <p:spTree>
+      <p:nvGrpSpPr>
+        <p:cNvPr id="1" name=""/>
+        <p:cNvGrpSpPr/>
+        <p:nvPr/>
+      </p:nvGrpSpPr>
+      <p:grpSpPr/>
+      <p:sp>
+        <p:nvSpPr>
+          <p:cNvPr id="2" name="Rectangle 1"/>
+          <p:cNvSpPr/>
+          <p:nvPr/>
+        </p:nvSpPr>
+        <p:spPr>
+          <a:xfrm>
+            <a:off x="0" y="0"/>
+            <a:ext cx="12188952" cy="54864"/>
           </a:xfrm>
           <a:prstGeom prst="rect">
             <a:avLst/>
@@ -17399,84 +19037,84 @@
       </p:sp>
       <p:sp>
         <p:nvSpPr>
+          <p:cNvPr id="3" name="TextBox 2"/>
+          <p:cNvSpPr txBox="1"/>
+          <p:nvPr/>
+        </p:nvSpPr>
+        <p:spPr>
+          <a:xfrm>
+            <a:off x="457200" y="146304"/>
+            <a:ext cx="9144000" cy="548640"/>
+          </a:xfrm>
+          <a:prstGeom prst="rect">
+            <a:avLst/>
+          </a:prstGeom>
+          <a:noFill/>
+        </p:spPr>
+        <p:txBody>
+          <a:bodyPr wrap="square">
+            <a:spAutoFit/>
+          </a:bodyPr>
+          <a:lstStyle/>
+          <a:p>
+            <a:pPr algn="l"/>
+            <a:r>
+              <a:rPr sz="2600" b="1" i="0">
+                <a:solidFill>
+                  <a:srgbClr val="FFFFFF"/>
+                </a:solidFill>
+                <a:latin typeface="Segoe UI"/>
+              </a:rPr>
+              <a:t>Dashboard — Data Model</a:t>
+            </a:r>
+          </a:p>
+        </p:txBody>
+      </p:sp>
+      <p:sp>
+        <p:nvSpPr>
           <p:cNvPr id="4" name="TextBox 3"/>
           <p:cNvSpPr txBox="1"/>
           <p:nvPr/>
         </p:nvSpPr>
         <p:spPr>
           <a:xfrm>
-            <a:off x="548640" y="1737360"/>
-            <a:ext cx="10972800" cy="658368"/>
-          </a:xfrm>
-          <a:prstGeom prst="rect">
-            <a:avLst/>
-          </a:prstGeom>
-          <a:noFill/>
-        </p:spPr>
-        <p:txBody>
-          <a:bodyPr wrap="square">
-            <a:spAutoFit/>
-          </a:bodyPr>
-          <a:lstStyle/>
-          <a:p>
-            <a:pPr algn="ctr"/>
-            <a:r>
-              <a:rPr sz="4000" b="1" i="0">
-                <a:solidFill>
-                  <a:srgbClr val="FFFFFF"/>
-                </a:solidFill>
-                <a:latin typeface="Segoe UI"/>
-              </a:rPr>
-              <a:t>Servallab QC Engine</a:t>
-            </a:r>
-          </a:p>
-        </p:txBody>
-      </p:sp>
-      <p:sp>
-        <p:nvSpPr>
-          <p:cNvPr id="5" name="TextBox 4"/>
-          <p:cNvSpPr txBox="1"/>
-          <p:nvPr/>
-        </p:nvSpPr>
-        <p:spPr>
-          <a:xfrm>
-            <a:off x="548640" y="2450592"/>
-            <a:ext cx="10972800" cy="475488"/>
-          </a:xfrm>
-          <a:prstGeom prst="rect">
-            <a:avLst/>
-          </a:prstGeom>
-          <a:noFill/>
-        </p:spPr>
-        <p:txBody>
-          <a:bodyPr wrap="square">
-            <a:spAutoFit/>
-          </a:bodyPr>
-          <a:lstStyle/>
-          <a:p>
-            <a:pPr algn="ctr"/>
-            <a:r>
-              <a:rPr sz="2000" b="0" i="0">
-                <a:solidFill>
-                  <a:srgbClr val="4AF0A0"/>
-                </a:solidFill>
-                <a:latin typeface="Segoe UI"/>
-              </a:rPr>
-              <a:t>Technical Reference Complete</a:t>
-            </a:r>
-          </a:p>
-        </p:txBody>
-      </p:sp>
-      <p:sp>
-        <p:nvSpPr>
-          <p:cNvPr id="6" name="Rectangle 5"/>
+            <a:off x="457200" y="640080"/>
+            <a:ext cx="10972800" cy="365760"/>
+          </a:xfrm>
+          <a:prstGeom prst="rect">
+            <a:avLst/>
+          </a:prstGeom>
+          <a:noFill/>
+        </p:spPr>
+        <p:txBody>
+          <a:bodyPr wrap="square">
+            <a:spAutoFit/>
+          </a:bodyPr>
+          <a:lstStyle/>
+          <a:p>
+            <a:pPr algn="l"/>
+            <a:r>
+              <a:rPr sz="1200" b="0" i="0">
+                <a:solidFill>
+                  <a:srgbClr val="8896A8"/>
+                </a:solidFill>
+                <a:latin typeface="Segoe UI"/>
+              </a:rPr>
+              <a:t>SQLite (SQLAlchemy ORM)  ·  dashboard/database.py</a:t>
+            </a:r>
+          </a:p>
+        </p:txBody>
+      </p:sp>
+      <p:sp>
+        <p:nvSpPr>
+          <p:cNvPr id="5" name="Rectangle 4"/>
           <p:cNvSpPr/>
           <p:nvPr/>
         </p:nvSpPr>
         <p:spPr>
           <a:xfrm>
-            <a:off x="3200400" y="3090672"/>
-            <a:ext cx="5788152" cy="18288"/>
+            <a:off x="457200" y="950976"/>
+            <a:ext cx="11274552" cy="18288"/>
           </a:xfrm>
           <a:prstGeom prst="rect">
             <a:avLst/>
@@ -17512,6 +19150,3238 @@
       </p:sp>
       <p:sp>
         <p:nvSpPr>
+          <p:cNvPr id="6" name="Rectangle 5"/>
+          <p:cNvSpPr/>
+          <p:nvPr/>
+        </p:nvSpPr>
+        <p:spPr>
+          <a:xfrm>
+            <a:off x="365760" y="1051560"/>
+            <a:ext cx="2743200" cy="2633472"/>
+          </a:xfrm>
+          <a:prstGeom prst="rect">
+            <a:avLst/>
+          </a:prstGeom>
+          <a:solidFill>
+            <a:srgbClr val="161A22"/>
+          </a:solidFill>
+          <a:ln>
+            <a:noFill/>
+          </a:ln>
+        </p:spPr>
+        <p:style>
+          <a:lnRef idx="1">
+            <a:schemeClr val="accent1"/>
+          </a:lnRef>
+          <a:fillRef idx="3">
+            <a:schemeClr val="accent1"/>
+          </a:fillRef>
+          <a:effectRef idx="2">
+            <a:schemeClr val="accent1"/>
+          </a:effectRef>
+          <a:fontRef idx="minor">
+            <a:schemeClr val="lt1"/>
+          </a:fontRef>
+        </p:style>
+        <p:txBody>
+          <a:bodyPr rtlCol="0" anchor="ctr"/>
+          <a:lstStyle/>
+          <a:p>
+            <a:pPr algn="ctr"/>
+          </a:p>
+        </p:txBody>
+      </p:sp>
+      <p:sp>
+        <p:nvSpPr>
+          <p:cNvPr id="7" name="Rectangle 6"/>
+          <p:cNvSpPr/>
+          <p:nvPr/>
+        </p:nvSpPr>
+        <p:spPr>
+          <a:xfrm>
+            <a:off x="365760" y="1051560"/>
+            <a:ext cx="2743200" cy="45720"/>
+          </a:xfrm>
+          <a:prstGeom prst="rect">
+            <a:avLst/>
+          </a:prstGeom>
+          <a:solidFill>
+            <a:srgbClr val="4A9EF0"/>
+          </a:solidFill>
+          <a:ln>
+            <a:noFill/>
+          </a:ln>
+        </p:spPr>
+        <p:style>
+          <a:lnRef idx="1">
+            <a:schemeClr val="accent1"/>
+          </a:lnRef>
+          <a:fillRef idx="3">
+            <a:schemeClr val="accent1"/>
+          </a:fillRef>
+          <a:effectRef idx="2">
+            <a:schemeClr val="accent1"/>
+          </a:effectRef>
+          <a:fontRef idx="minor">
+            <a:schemeClr val="lt1"/>
+          </a:fontRef>
+        </p:style>
+        <p:txBody>
+          <a:bodyPr rtlCol="0" anchor="ctr"/>
+          <a:lstStyle/>
+          <a:p>
+            <a:pPr algn="ctr"/>
+          </a:p>
+        </p:txBody>
+      </p:sp>
+      <p:sp>
+        <p:nvSpPr>
+          <p:cNvPr id="8" name="TextBox 7"/>
+          <p:cNvSpPr txBox="1"/>
+          <p:nvPr/>
+        </p:nvSpPr>
+        <p:spPr>
+          <a:xfrm>
+            <a:off x="475488" y="1143000"/>
+            <a:ext cx="2514600" cy="347472"/>
+          </a:xfrm>
+          <a:prstGeom prst="rect">
+            <a:avLst/>
+          </a:prstGeom>
+          <a:noFill/>
+        </p:spPr>
+        <p:txBody>
+          <a:bodyPr wrap="square">
+            <a:spAutoFit/>
+          </a:bodyPr>
+          <a:lstStyle/>
+          <a:p>
+            <a:pPr algn="l"/>
+            <a:r>
+              <a:rPr sz="1100" b="1" i="0">
+                <a:solidFill>
+                  <a:srgbClr val="FFFFFF"/>
+                </a:solidFill>
+                <a:latin typeface="Segoe UI"/>
+              </a:rPr>
+              <a:t>User</a:t>
+            </a:r>
+          </a:p>
+        </p:txBody>
+      </p:sp>
+      <p:sp>
+        <p:nvSpPr>
+          <p:cNvPr id="9" name="TextBox 8"/>
+          <p:cNvSpPr txBox="1"/>
+          <p:nvPr/>
+        </p:nvSpPr>
+        <p:spPr>
+          <a:xfrm>
+            <a:off x="475488" y="1581912"/>
+            <a:ext cx="2514600" cy="566928"/>
+          </a:xfrm>
+          <a:prstGeom prst="rect">
+            <a:avLst/>
+          </a:prstGeom>
+          <a:noFill/>
+        </p:spPr>
+        <p:txBody>
+          <a:bodyPr wrap="square">
+            <a:spAutoFit/>
+          </a:bodyPr>
+          <a:lstStyle/>
+          <a:p>
+            <a:pPr algn="l"/>
+            <a:r>
+              <a:rPr sz="900" b="0" i="0">
+                <a:solidFill>
+                  <a:srgbClr val="8896A8"/>
+                </a:solidFill>
+                <a:latin typeface="Segoe UI"/>
+              </a:rPr>
+              <a:t>· id, email, hashed_password</a:t>
+            </a:r>
+          </a:p>
+        </p:txBody>
+      </p:sp>
+      <p:sp>
+        <p:nvSpPr>
+          <p:cNvPr id="10" name="TextBox 9"/>
+          <p:cNvSpPr txBox="1"/>
+          <p:nvPr/>
+        </p:nvSpPr>
+        <p:spPr>
+          <a:xfrm>
+            <a:off x="475488" y="2203704"/>
+            <a:ext cx="2514600" cy="566928"/>
+          </a:xfrm>
+          <a:prstGeom prst="rect">
+            <a:avLst/>
+          </a:prstGeom>
+          <a:noFill/>
+        </p:spPr>
+        <p:txBody>
+          <a:bodyPr wrap="square">
+            <a:spAutoFit/>
+          </a:bodyPr>
+          <a:lstStyle/>
+          <a:p>
+            <a:pPr algn="l"/>
+            <a:r>
+              <a:rPr sz="900" b="0" i="0">
+                <a:solidFill>
+                  <a:srgbClr val="8896A8"/>
+                </a:solidFill>
+                <a:latin typeface="Segoe UI"/>
+              </a:rPr>
+              <a:t>· role: admin / manager / viewer</a:t>
+            </a:r>
+          </a:p>
+        </p:txBody>
+      </p:sp>
+      <p:sp>
+        <p:nvSpPr>
+          <p:cNvPr id="11" name="TextBox 10"/>
+          <p:cNvSpPr txBox="1"/>
+          <p:nvPr/>
+        </p:nvSpPr>
+        <p:spPr>
+          <a:xfrm>
+            <a:off x="475488" y="2825496"/>
+            <a:ext cx="2514600" cy="566928"/>
+          </a:xfrm>
+          <a:prstGeom prst="rect">
+            <a:avLst/>
+          </a:prstGeom>
+          <a:noFill/>
+        </p:spPr>
+        <p:txBody>
+          <a:bodyPr wrap="square">
+            <a:spAutoFit/>
+          </a:bodyPr>
+          <a:lstStyle/>
+          <a:p>
+            <a:pPr algn="l"/>
+            <a:r>
+              <a:rPr sz="900" b="0" i="0">
+                <a:solidFill>
+                  <a:srgbClr val="8896A8"/>
+                </a:solidFill>
+                <a:latin typeface="Segoe UI"/>
+              </a:rPr>
+              <a:t>· created_at, is_active</a:t>
+            </a:r>
+          </a:p>
+        </p:txBody>
+      </p:sp>
+      <p:sp>
+        <p:nvSpPr>
+          <p:cNvPr id="12" name="Rectangle 11"/>
+          <p:cNvSpPr/>
+          <p:nvPr/>
+        </p:nvSpPr>
+        <p:spPr>
+          <a:xfrm>
+            <a:off x="3310128" y="1051560"/>
+            <a:ext cx="2743200" cy="2633472"/>
+          </a:xfrm>
+          <a:prstGeom prst="rect">
+            <a:avLst/>
+          </a:prstGeom>
+          <a:solidFill>
+            <a:srgbClr val="161A22"/>
+          </a:solidFill>
+          <a:ln>
+            <a:noFill/>
+          </a:ln>
+        </p:spPr>
+        <p:style>
+          <a:lnRef idx="1">
+            <a:schemeClr val="accent1"/>
+          </a:lnRef>
+          <a:fillRef idx="3">
+            <a:schemeClr val="accent1"/>
+          </a:fillRef>
+          <a:effectRef idx="2">
+            <a:schemeClr val="accent1"/>
+          </a:effectRef>
+          <a:fontRef idx="minor">
+            <a:schemeClr val="lt1"/>
+          </a:fontRef>
+        </p:style>
+        <p:txBody>
+          <a:bodyPr rtlCol="0" anchor="ctr"/>
+          <a:lstStyle/>
+          <a:p>
+            <a:pPr algn="ctr"/>
+          </a:p>
+        </p:txBody>
+      </p:sp>
+      <p:sp>
+        <p:nvSpPr>
+          <p:cNvPr id="13" name="Rectangle 12"/>
+          <p:cNvSpPr/>
+          <p:nvPr/>
+        </p:nvSpPr>
+        <p:spPr>
+          <a:xfrm>
+            <a:off x="3310128" y="1051560"/>
+            <a:ext cx="2743200" cy="45720"/>
+          </a:xfrm>
+          <a:prstGeom prst="rect">
+            <a:avLst/>
+          </a:prstGeom>
+          <a:solidFill>
+            <a:srgbClr val="4AF0A0"/>
+          </a:solidFill>
+          <a:ln>
+            <a:noFill/>
+          </a:ln>
+        </p:spPr>
+        <p:style>
+          <a:lnRef idx="1">
+            <a:schemeClr val="accent1"/>
+          </a:lnRef>
+          <a:fillRef idx="3">
+            <a:schemeClr val="accent1"/>
+          </a:fillRef>
+          <a:effectRef idx="2">
+            <a:schemeClr val="accent1"/>
+          </a:effectRef>
+          <a:fontRef idx="minor">
+            <a:schemeClr val="lt1"/>
+          </a:fontRef>
+        </p:style>
+        <p:txBody>
+          <a:bodyPr rtlCol="0" anchor="ctr"/>
+          <a:lstStyle/>
+          <a:p>
+            <a:pPr algn="ctr"/>
+          </a:p>
+        </p:txBody>
+      </p:sp>
+      <p:sp>
+        <p:nvSpPr>
+          <p:cNvPr id="14" name="TextBox 13"/>
+          <p:cNvSpPr txBox="1"/>
+          <p:nvPr/>
+        </p:nvSpPr>
+        <p:spPr>
+          <a:xfrm>
+            <a:off x="3419856" y="1143000"/>
+            <a:ext cx="2514600" cy="347472"/>
+          </a:xfrm>
+          <a:prstGeom prst="rect">
+            <a:avLst/>
+          </a:prstGeom>
+          <a:noFill/>
+        </p:spPr>
+        <p:txBody>
+          <a:bodyPr wrap="square">
+            <a:spAutoFit/>
+          </a:bodyPr>
+          <a:lstStyle/>
+          <a:p>
+            <a:pPr algn="l"/>
+            <a:r>
+              <a:rPr sz="1100" b="1" i="0">
+                <a:solidFill>
+                  <a:srgbClr val="FFFFFF"/>
+                </a:solidFill>
+                <a:latin typeface="Segoe UI"/>
+              </a:rPr>
+              <a:t>Project</a:t>
+            </a:r>
+          </a:p>
+        </p:txBody>
+      </p:sp>
+      <p:sp>
+        <p:nvSpPr>
+          <p:cNvPr id="15" name="TextBox 14"/>
+          <p:cNvSpPr txBox="1"/>
+          <p:nvPr/>
+        </p:nvSpPr>
+        <p:spPr>
+          <a:xfrm>
+            <a:off x="3419856" y="1581912"/>
+            <a:ext cx="2514600" cy="566928"/>
+          </a:xfrm>
+          <a:prstGeom prst="rect">
+            <a:avLst/>
+          </a:prstGeom>
+          <a:noFill/>
+        </p:spPr>
+        <p:txBody>
+          <a:bodyPr wrap="square">
+            <a:spAutoFit/>
+          </a:bodyPr>
+          <a:lstStyle/>
+          <a:p>
+            <a:pPr algn="l"/>
+            <a:r>
+              <a:rPr sz="900" b="0" i="0">
+                <a:solidFill>
+                  <a:srgbClr val="8896A8"/>
+                </a:solidFill>
+                <a:latin typeface="Segoe UI"/>
+              </a:rPr>
+              <a:t>· id, name, status (active/closed)</a:t>
+            </a:r>
+          </a:p>
+        </p:txBody>
+      </p:sp>
+      <p:sp>
+        <p:nvSpPr>
+          <p:cNvPr id="16" name="TextBox 15"/>
+          <p:cNvSpPr txBox="1"/>
+          <p:nvPr/>
+        </p:nvSpPr>
+        <p:spPr>
+          <a:xfrm>
+            <a:off x="3419856" y="2203704"/>
+            <a:ext cx="2514600" cy="566928"/>
+          </a:xfrm>
+          <a:prstGeom prst="rect">
+            <a:avLst/>
+          </a:prstGeom>
+          <a:noFill/>
+        </p:spPr>
+        <p:txBody>
+          <a:bodyPr wrap="square">
+            <a:spAutoFit/>
+          </a:bodyPr>
+          <a:lstStyle/>
+          <a:p>
+            <a:pPr algn="l"/>
+            <a:r>
+              <a:rPr sz="900" b="0" i="0">
+                <a:solidFill>
+                  <a:srgbClr val="8896A8"/>
+                </a:solidFill>
+                <a:latin typeface="Segoe UI"/>
+              </a:rPr>
+              <a:t>· manager_id → User</a:t>
+            </a:r>
+          </a:p>
+        </p:txBody>
+      </p:sp>
+      <p:sp>
+        <p:nvSpPr>
+          <p:cNvPr id="17" name="TextBox 16"/>
+          <p:cNvSpPr txBox="1"/>
+          <p:nvPr/>
+        </p:nvSpPr>
+        <p:spPr>
+          <a:xfrm>
+            <a:off x="3419856" y="2825496"/>
+            <a:ext cx="2514600" cy="566928"/>
+          </a:xfrm>
+          <a:prstGeom prst="rect">
+            <a:avLst/>
+          </a:prstGeom>
+          <a:noFill/>
+        </p:spPr>
+        <p:txBody>
+          <a:bodyPr wrap="square">
+            <a:spAutoFit/>
+          </a:bodyPr>
+          <a:lstStyle/>
+          <a:p>
+            <a:pPr algn="l"/>
+            <a:r>
+              <a:rPr sz="900" b="0" i="0">
+                <a:solidFill>
+                  <a:srgbClr val="8896A8"/>
+                </a:solidFill>
+                <a:latin typeface="Segoe UI"/>
+              </a:rPr>
+              <a:t>· created_at, wave_count</a:t>
+            </a:r>
+          </a:p>
+        </p:txBody>
+      </p:sp>
+      <p:sp>
+        <p:nvSpPr>
+          <p:cNvPr id="18" name="Rectangle 17"/>
+          <p:cNvSpPr/>
+          <p:nvPr/>
+        </p:nvSpPr>
+        <p:spPr>
+          <a:xfrm>
+            <a:off x="6254496" y="1051560"/>
+            <a:ext cx="2743200" cy="2633472"/>
+          </a:xfrm>
+          <a:prstGeom prst="rect">
+            <a:avLst/>
+          </a:prstGeom>
+          <a:solidFill>
+            <a:srgbClr val="161A22"/>
+          </a:solidFill>
+          <a:ln>
+            <a:noFill/>
+          </a:ln>
+        </p:spPr>
+        <p:style>
+          <a:lnRef idx="1">
+            <a:schemeClr val="accent1"/>
+          </a:lnRef>
+          <a:fillRef idx="3">
+            <a:schemeClr val="accent1"/>
+          </a:fillRef>
+          <a:effectRef idx="2">
+            <a:schemeClr val="accent1"/>
+          </a:effectRef>
+          <a:fontRef idx="minor">
+            <a:schemeClr val="lt1"/>
+          </a:fontRef>
+        </p:style>
+        <p:txBody>
+          <a:bodyPr rtlCol="0" anchor="ctr"/>
+          <a:lstStyle/>
+          <a:p>
+            <a:pPr algn="ctr"/>
+          </a:p>
+        </p:txBody>
+      </p:sp>
+      <p:sp>
+        <p:nvSpPr>
+          <p:cNvPr id="19" name="Rectangle 18"/>
+          <p:cNvSpPr/>
+          <p:nvPr/>
+        </p:nvSpPr>
+        <p:spPr>
+          <a:xfrm>
+            <a:off x="6254496" y="1051560"/>
+            <a:ext cx="2743200" cy="45720"/>
+          </a:xfrm>
+          <a:prstGeom prst="rect">
+            <a:avLst/>
+          </a:prstGeom>
+          <a:solidFill>
+            <a:srgbClr val="F0C04A"/>
+          </a:solidFill>
+          <a:ln>
+            <a:noFill/>
+          </a:ln>
+        </p:spPr>
+        <p:style>
+          <a:lnRef idx="1">
+            <a:schemeClr val="accent1"/>
+          </a:lnRef>
+          <a:fillRef idx="3">
+            <a:schemeClr val="accent1"/>
+          </a:fillRef>
+          <a:effectRef idx="2">
+            <a:schemeClr val="accent1"/>
+          </a:effectRef>
+          <a:fontRef idx="minor">
+            <a:schemeClr val="lt1"/>
+          </a:fontRef>
+        </p:style>
+        <p:txBody>
+          <a:bodyPr rtlCol="0" anchor="ctr"/>
+          <a:lstStyle/>
+          <a:p>
+            <a:pPr algn="ctr"/>
+          </a:p>
+        </p:txBody>
+      </p:sp>
+      <p:sp>
+        <p:nvSpPr>
+          <p:cNvPr id="20" name="TextBox 19"/>
+          <p:cNvSpPr txBox="1"/>
+          <p:nvPr/>
+        </p:nvSpPr>
+        <p:spPr>
+          <a:xfrm>
+            <a:off x="6364224" y="1143000"/>
+            <a:ext cx="2514600" cy="347472"/>
+          </a:xfrm>
+          <a:prstGeom prst="rect">
+            <a:avLst/>
+          </a:prstGeom>
+          <a:noFill/>
+        </p:spPr>
+        <p:txBody>
+          <a:bodyPr wrap="square">
+            <a:spAutoFit/>
+          </a:bodyPr>
+          <a:lstStyle/>
+          <a:p>
+            <a:pPr algn="l"/>
+            <a:r>
+              <a:rPr sz="1100" b="1" i="0">
+                <a:solidFill>
+                  <a:srgbClr val="FFFFFF"/>
+                </a:solidFill>
+                <a:latin typeface="Segoe UI"/>
+              </a:rPr>
+              <a:t>UploadLog</a:t>
+            </a:r>
+          </a:p>
+        </p:txBody>
+      </p:sp>
+      <p:sp>
+        <p:nvSpPr>
+          <p:cNvPr id="21" name="TextBox 20"/>
+          <p:cNvSpPr txBox="1"/>
+          <p:nvPr/>
+        </p:nvSpPr>
+        <p:spPr>
+          <a:xfrm>
+            <a:off x="6364224" y="1581912"/>
+            <a:ext cx="2514600" cy="566928"/>
+          </a:xfrm>
+          <a:prstGeom prst="rect">
+            <a:avLst/>
+          </a:prstGeom>
+          <a:noFill/>
+        </p:spPr>
+        <p:txBody>
+          <a:bodyPr wrap="square">
+            <a:spAutoFit/>
+          </a:bodyPr>
+          <a:lstStyle/>
+          <a:p>
+            <a:pPr algn="l"/>
+            <a:r>
+              <a:rPr sz="900" b="0" i="0">
+                <a:solidFill>
+                  <a:srgbClr val="8896A8"/>
+                </a:solidFill>
+                <a:latin typeface="Segoe UI"/>
+              </a:rPr>
+              <a:t>· id, project_id → Project</a:t>
+            </a:r>
+          </a:p>
+        </p:txBody>
+      </p:sp>
+      <p:sp>
+        <p:nvSpPr>
+          <p:cNvPr id="22" name="TextBox 21"/>
+          <p:cNvSpPr txBox="1"/>
+          <p:nvPr/>
+        </p:nvSpPr>
+        <p:spPr>
+          <a:xfrm>
+            <a:off x="6364224" y="2203704"/>
+            <a:ext cx="2514600" cy="566928"/>
+          </a:xfrm>
+          <a:prstGeom prst="rect">
+            <a:avLst/>
+          </a:prstGeom>
+          <a:noFill/>
+        </p:spPr>
+        <p:txBody>
+          <a:bodyPr wrap="square">
+            <a:spAutoFit/>
+          </a:bodyPr>
+          <a:lstStyle/>
+          <a:p>
+            <a:pPr algn="l"/>
+            <a:r>
+              <a:rPr sz="900" b="0" i="0">
+                <a:solidFill>
+                  <a:srgbClr val="8896A8"/>
+                </a:solidFill>
+                <a:latin typeface="Segoe UI"/>
+              </a:rPr>
+              <a:t>· file_id, filename, wave_label</a:t>
+            </a:r>
+          </a:p>
+        </p:txBody>
+      </p:sp>
+      <p:sp>
+        <p:nvSpPr>
+          <p:cNvPr id="23" name="TextBox 22"/>
+          <p:cNvSpPr txBox="1"/>
+          <p:nvPr/>
+        </p:nvSpPr>
+        <p:spPr>
+          <a:xfrm>
+            <a:off x="6364224" y="2825496"/>
+            <a:ext cx="2514600" cy="566928"/>
+          </a:xfrm>
+          <a:prstGeom prst="rect">
+            <a:avLst/>
+          </a:prstGeom>
+          <a:noFill/>
+        </p:spPr>
+        <p:txBody>
+          <a:bodyPr wrap="square">
+            <a:spAutoFit/>
+          </a:bodyPr>
+          <a:lstStyle/>
+          <a:p>
+            <a:pPr algn="l"/>
+            <a:r>
+              <a:rPr sz="900" b="0" i="0">
+                <a:solidFill>
+                  <a:srgbClr val="8896A8"/>
+                </a:solidFill>
+                <a:latin typeface="Segoe UI"/>
+              </a:rPr>
+              <a:t>· total_records, flag_count</a:t>
+            </a:r>
+          </a:p>
+        </p:txBody>
+      </p:sp>
+      <p:sp>
+        <p:nvSpPr>
+          <p:cNvPr id="24" name="TextBox 23"/>
+          <p:cNvSpPr txBox="1"/>
+          <p:nvPr/>
+        </p:nvSpPr>
+        <p:spPr>
+          <a:xfrm>
+            <a:off x="6364224" y="3447288"/>
+            <a:ext cx="2514600" cy="566928"/>
+          </a:xfrm>
+          <a:prstGeom prst="rect">
+            <a:avLst/>
+          </a:prstGeom>
+          <a:noFill/>
+        </p:spPr>
+        <p:txBody>
+          <a:bodyPr wrap="square">
+            <a:spAutoFit/>
+          </a:bodyPr>
+          <a:lstStyle/>
+          <a:p>
+            <a:pPr algn="l"/>
+            <a:r>
+              <a:rPr sz="900" b="0" i="0">
+                <a:solidFill>
+                  <a:srgbClr val="8896A8"/>
+                </a:solidFill>
+                <a:latin typeface="Segoe UI"/>
+              </a:rPr>
+              <a:t>· uploaded_at</a:t>
+            </a:r>
+          </a:p>
+        </p:txBody>
+      </p:sp>
+      <p:sp>
+        <p:nvSpPr>
+          <p:cNvPr id="25" name="Rectangle 24"/>
+          <p:cNvSpPr/>
+          <p:nvPr/>
+        </p:nvSpPr>
+        <p:spPr>
+          <a:xfrm>
+            <a:off x="9198864" y="1051560"/>
+            <a:ext cx="2743200" cy="2633472"/>
+          </a:xfrm>
+          <a:prstGeom prst="rect">
+            <a:avLst/>
+          </a:prstGeom>
+          <a:solidFill>
+            <a:srgbClr val="161A22"/>
+          </a:solidFill>
+          <a:ln>
+            <a:noFill/>
+          </a:ln>
+        </p:spPr>
+        <p:style>
+          <a:lnRef idx="1">
+            <a:schemeClr val="accent1"/>
+          </a:lnRef>
+          <a:fillRef idx="3">
+            <a:schemeClr val="accent1"/>
+          </a:fillRef>
+          <a:effectRef idx="2">
+            <a:schemeClr val="accent1"/>
+          </a:effectRef>
+          <a:fontRef idx="minor">
+            <a:schemeClr val="lt1"/>
+          </a:fontRef>
+        </p:style>
+        <p:txBody>
+          <a:bodyPr rtlCol="0" anchor="ctr"/>
+          <a:lstStyle/>
+          <a:p>
+            <a:pPr algn="ctr"/>
+          </a:p>
+        </p:txBody>
+      </p:sp>
+      <p:sp>
+        <p:nvSpPr>
+          <p:cNvPr id="26" name="Rectangle 25"/>
+          <p:cNvSpPr/>
+          <p:nvPr/>
+        </p:nvSpPr>
+        <p:spPr>
+          <a:xfrm>
+            <a:off x="9198864" y="1051560"/>
+            <a:ext cx="2743200" cy="45720"/>
+          </a:xfrm>
+          <a:prstGeom prst="rect">
+            <a:avLst/>
+          </a:prstGeom>
+          <a:solidFill>
+            <a:srgbClr val="4A9EF0"/>
+          </a:solidFill>
+          <a:ln>
+            <a:noFill/>
+          </a:ln>
+        </p:spPr>
+        <p:style>
+          <a:lnRef idx="1">
+            <a:schemeClr val="accent1"/>
+          </a:lnRef>
+          <a:fillRef idx="3">
+            <a:schemeClr val="accent1"/>
+          </a:fillRef>
+          <a:effectRef idx="2">
+            <a:schemeClr val="accent1"/>
+          </a:effectRef>
+          <a:fontRef idx="minor">
+            <a:schemeClr val="lt1"/>
+          </a:fontRef>
+        </p:style>
+        <p:txBody>
+          <a:bodyPr rtlCol="0" anchor="ctr"/>
+          <a:lstStyle/>
+          <a:p>
+            <a:pPr algn="ctr"/>
+          </a:p>
+        </p:txBody>
+      </p:sp>
+      <p:sp>
+        <p:nvSpPr>
+          <p:cNvPr id="27" name="TextBox 26"/>
+          <p:cNvSpPr txBox="1"/>
+          <p:nvPr/>
+        </p:nvSpPr>
+        <p:spPr>
+          <a:xfrm>
+            <a:off x="9308592" y="1143000"/>
+            <a:ext cx="2514600" cy="347472"/>
+          </a:xfrm>
+          <a:prstGeom prst="rect">
+            <a:avLst/>
+          </a:prstGeom>
+          <a:noFill/>
+        </p:spPr>
+        <p:txBody>
+          <a:bodyPr wrap="square">
+            <a:spAutoFit/>
+          </a:bodyPr>
+          <a:lstStyle/>
+          <a:p>
+            <a:pPr algn="l"/>
+            <a:r>
+              <a:rPr sz="1100" b="1" i="0">
+                <a:solidFill>
+                  <a:srgbClr val="FFFFFF"/>
+                </a:solidFill>
+                <a:latin typeface="Segoe UI"/>
+              </a:rPr>
+              <a:t>Interviewer</a:t>
+            </a:r>
+          </a:p>
+        </p:txBody>
+      </p:sp>
+      <p:sp>
+        <p:nvSpPr>
+          <p:cNvPr id="28" name="TextBox 27"/>
+          <p:cNvSpPr txBox="1"/>
+          <p:nvPr/>
+        </p:nvSpPr>
+        <p:spPr>
+          <a:xfrm>
+            <a:off x="9308592" y="1581912"/>
+            <a:ext cx="2514600" cy="566928"/>
+          </a:xfrm>
+          <a:prstGeom prst="rect">
+            <a:avLst/>
+          </a:prstGeom>
+          <a:noFill/>
+        </p:spPr>
+        <p:txBody>
+          <a:bodyPr wrap="square">
+            <a:spAutoFit/>
+          </a:bodyPr>
+          <a:lstStyle/>
+          <a:p>
+            <a:pPr algn="l"/>
+            <a:r>
+              <a:rPr sz="900" b="0" i="0">
+                <a:solidFill>
+                  <a:srgbClr val="8896A8"/>
+                </a:solidFill>
+                <a:latin typeface="Segoe UI"/>
+              </a:rPr>
+              <a:t>· id, interviewer_code (unique)</a:t>
+            </a:r>
+          </a:p>
+        </p:txBody>
+      </p:sp>
+      <p:sp>
+        <p:nvSpPr>
+          <p:cNvPr id="29" name="TextBox 28"/>
+          <p:cNvSpPr txBox="1"/>
+          <p:nvPr/>
+        </p:nvSpPr>
+        <p:spPr>
+          <a:xfrm>
+            <a:off x="9308592" y="2203704"/>
+            <a:ext cx="2514600" cy="566928"/>
+          </a:xfrm>
+          <a:prstGeom prst="rect">
+            <a:avLst/>
+          </a:prstGeom>
+          <a:noFill/>
+        </p:spPr>
+        <p:txBody>
+          <a:bodyPr wrap="square">
+            <a:spAutoFit/>
+          </a:bodyPr>
+          <a:lstStyle/>
+          <a:p>
+            <a:pPr algn="l"/>
+            <a:r>
+              <a:rPr sz="900" b="0" i="0">
+                <a:solidFill>
+                  <a:srgbClr val="8896A8"/>
+                </a:solidFill>
+                <a:latin typeface="Segoe UI"/>
+              </a:rPr>
+              <a:t>· name, supervisor_name</a:t>
+            </a:r>
+          </a:p>
+        </p:txBody>
+      </p:sp>
+      <p:sp>
+        <p:nvSpPr>
+          <p:cNvPr id="30" name="TextBox 29"/>
+          <p:cNvSpPr txBox="1"/>
+          <p:nvPr/>
+        </p:nvSpPr>
+        <p:spPr>
+          <a:xfrm>
+            <a:off x="9308592" y="2825496"/>
+            <a:ext cx="2514600" cy="566928"/>
+          </a:xfrm>
+          <a:prstGeom prst="rect">
+            <a:avLst/>
+          </a:prstGeom>
+          <a:noFill/>
+        </p:spPr>
+        <p:txBody>
+          <a:bodyPr wrap="square">
+            <a:spAutoFit/>
+          </a:bodyPr>
+          <a:lstStyle/>
+          <a:p>
+            <a:pPr algn="l"/>
+            <a:r>
+              <a:rPr sz="900" b="0" i="0">
+                <a:solidFill>
+                  <a:srgbClr val="8896A8"/>
+                </a:solidFill>
+                <a:latin typeface="Segoe UI"/>
+              </a:rPr>
+              <a:t>· created_at, is_active</a:t>
+            </a:r>
+          </a:p>
+        </p:txBody>
+      </p:sp>
+      <p:sp>
+        <p:nvSpPr>
+          <p:cNvPr id="31" name="Rectangle 30"/>
+          <p:cNvSpPr/>
+          <p:nvPr/>
+        </p:nvSpPr>
+        <p:spPr>
+          <a:xfrm>
+            <a:off x="365760" y="3840479"/>
+            <a:ext cx="2743200" cy="2633472"/>
+          </a:xfrm>
+          <a:prstGeom prst="rect">
+            <a:avLst/>
+          </a:prstGeom>
+          <a:solidFill>
+            <a:srgbClr val="161A22"/>
+          </a:solidFill>
+          <a:ln>
+            <a:noFill/>
+          </a:ln>
+        </p:spPr>
+        <p:style>
+          <a:lnRef idx="1">
+            <a:schemeClr val="accent1"/>
+          </a:lnRef>
+          <a:fillRef idx="3">
+            <a:schemeClr val="accent1"/>
+          </a:fillRef>
+          <a:effectRef idx="2">
+            <a:schemeClr val="accent1"/>
+          </a:effectRef>
+          <a:fontRef idx="minor">
+            <a:schemeClr val="lt1"/>
+          </a:fontRef>
+        </p:style>
+        <p:txBody>
+          <a:bodyPr rtlCol="0" anchor="ctr"/>
+          <a:lstStyle/>
+          <a:p>
+            <a:pPr algn="ctr"/>
+          </a:p>
+        </p:txBody>
+      </p:sp>
+      <p:sp>
+        <p:nvSpPr>
+          <p:cNvPr id="32" name="Rectangle 31"/>
+          <p:cNvSpPr/>
+          <p:nvPr/>
+        </p:nvSpPr>
+        <p:spPr>
+          <a:xfrm>
+            <a:off x="365760" y="3840479"/>
+            <a:ext cx="2743200" cy="45720"/>
+          </a:xfrm>
+          <a:prstGeom prst="rect">
+            <a:avLst/>
+          </a:prstGeom>
+          <a:solidFill>
+            <a:srgbClr val="F05A5A"/>
+          </a:solidFill>
+          <a:ln>
+            <a:noFill/>
+          </a:ln>
+        </p:spPr>
+        <p:style>
+          <a:lnRef idx="1">
+            <a:schemeClr val="accent1"/>
+          </a:lnRef>
+          <a:fillRef idx="3">
+            <a:schemeClr val="accent1"/>
+          </a:fillRef>
+          <a:effectRef idx="2">
+            <a:schemeClr val="accent1"/>
+          </a:effectRef>
+          <a:fontRef idx="minor">
+            <a:schemeClr val="lt1"/>
+          </a:fontRef>
+        </p:style>
+        <p:txBody>
+          <a:bodyPr rtlCol="0" anchor="ctr"/>
+          <a:lstStyle/>
+          <a:p>
+            <a:pPr algn="ctr"/>
+          </a:p>
+        </p:txBody>
+      </p:sp>
+      <p:sp>
+        <p:nvSpPr>
+          <p:cNvPr id="33" name="TextBox 32"/>
+          <p:cNvSpPr txBox="1"/>
+          <p:nvPr/>
+        </p:nvSpPr>
+        <p:spPr>
+          <a:xfrm>
+            <a:off x="475488" y="3931919"/>
+            <a:ext cx="2514600" cy="347472"/>
+          </a:xfrm>
+          <a:prstGeom prst="rect">
+            <a:avLst/>
+          </a:prstGeom>
+          <a:noFill/>
+        </p:spPr>
+        <p:txBody>
+          <a:bodyPr wrap="square">
+            <a:spAutoFit/>
+          </a:bodyPr>
+          <a:lstStyle/>
+          <a:p>
+            <a:pPr algn="l"/>
+            <a:r>
+              <a:rPr sz="1100" b="1" i="0">
+                <a:solidFill>
+                  <a:srgbClr val="FFFFFF"/>
+                </a:solidFill>
+                <a:latin typeface="Segoe UI"/>
+              </a:rPr>
+              <a:t>InterviewerQuality</a:t>
+            </a:r>
+          </a:p>
+        </p:txBody>
+      </p:sp>
+      <p:sp>
+        <p:nvSpPr>
+          <p:cNvPr id="34" name="TextBox 33"/>
+          <p:cNvSpPr txBox="1"/>
+          <p:nvPr/>
+        </p:nvSpPr>
+        <p:spPr>
+          <a:xfrm>
+            <a:off x="475488" y="4370831"/>
+            <a:ext cx="2514600" cy="566928"/>
+          </a:xfrm>
+          <a:prstGeom prst="rect">
+            <a:avLst/>
+          </a:prstGeom>
+          <a:noFill/>
+        </p:spPr>
+        <p:txBody>
+          <a:bodyPr wrap="square">
+            <a:spAutoFit/>
+          </a:bodyPr>
+          <a:lstStyle/>
+          <a:p>
+            <a:pPr algn="l"/>
+            <a:r>
+              <a:rPr sz="900" b="0" i="0">
+                <a:solidFill>
+                  <a:srgbClr val="8896A8"/>
+                </a:solidFill>
+                <a:latin typeface="Segoe UI"/>
+              </a:rPr>
+              <a:t>· interviewer_id → Interviewer</a:t>
+            </a:r>
+          </a:p>
+        </p:txBody>
+      </p:sp>
+      <p:sp>
+        <p:nvSpPr>
+          <p:cNvPr id="35" name="TextBox 34"/>
+          <p:cNvSpPr txBox="1"/>
+          <p:nvPr/>
+        </p:nvSpPr>
+        <p:spPr>
+          <a:xfrm>
+            <a:off x="475488" y="4992623"/>
+            <a:ext cx="2514600" cy="566928"/>
+          </a:xfrm>
+          <a:prstGeom prst="rect">
+            <a:avLst/>
+          </a:prstGeom>
+          <a:noFill/>
+        </p:spPr>
+        <p:txBody>
+          <a:bodyPr wrap="square">
+            <a:spAutoFit/>
+          </a:bodyPr>
+          <a:lstStyle/>
+          <a:p>
+            <a:pPr algn="l"/>
+            <a:r>
+              <a:rPr sz="900" b="0" i="0">
+                <a:solidFill>
+                  <a:srgbClr val="8896A8"/>
+                </a:solidFill>
+                <a:latin typeface="Segoe UI"/>
+              </a:rPr>
+              <a:t>· project_id → Project</a:t>
+            </a:r>
+          </a:p>
+        </p:txBody>
+      </p:sp>
+      <p:sp>
+        <p:nvSpPr>
+          <p:cNvPr id="36" name="TextBox 35"/>
+          <p:cNvSpPr txBox="1"/>
+          <p:nvPr/>
+        </p:nvSpPr>
+        <p:spPr>
+          <a:xfrm>
+            <a:off x="475488" y="5614416"/>
+            <a:ext cx="2514600" cy="566928"/>
+          </a:xfrm>
+          <a:prstGeom prst="rect">
+            <a:avLst/>
+          </a:prstGeom>
+          <a:noFill/>
+        </p:spPr>
+        <p:txBody>
+          <a:bodyPr wrap="square">
+            <a:spAutoFit/>
+          </a:bodyPr>
+          <a:lstStyle/>
+          <a:p>
+            <a:pPr algn="l"/>
+            <a:r>
+              <a:rPr sz="900" b="0" i="0">
+                <a:solidFill>
+                  <a:srgbClr val="8896A8"/>
+                </a:solidFill>
+                <a:latin typeface="Segoe UI"/>
+              </a:rPr>
+              <a:t>· total_interviews, duration_flags</a:t>
+            </a:r>
+          </a:p>
+        </p:txBody>
+      </p:sp>
+      <p:sp>
+        <p:nvSpPr>
+          <p:cNvPr id="37" name="TextBox 36"/>
+          <p:cNvSpPr txBox="1"/>
+          <p:nvPr/>
+        </p:nvSpPr>
+        <p:spPr>
+          <a:xfrm>
+            <a:off x="475488" y="6236207"/>
+            <a:ext cx="2514600" cy="566928"/>
+          </a:xfrm>
+          <a:prstGeom prst="rect">
+            <a:avLst/>
+          </a:prstGeom>
+          <a:noFill/>
+        </p:spPr>
+        <p:txBody>
+          <a:bodyPr wrap="square">
+            <a:spAutoFit/>
+          </a:bodyPr>
+          <a:lstStyle/>
+          <a:p>
+            <a:pPr algn="l"/>
+            <a:r>
+              <a:rPr sz="900" b="0" i="0">
+                <a:solidFill>
+                  <a:srgbClr val="8896A8"/>
+                </a:solidFill>
+                <a:latin typeface="Segoe UI"/>
+              </a:rPr>
+              <a:t>· sl_flags, total_flags</a:t>
+            </a:r>
+          </a:p>
+        </p:txBody>
+      </p:sp>
+      <p:sp>
+        <p:nvSpPr>
+          <p:cNvPr id="38" name="Rectangle 37"/>
+          <p:cNvSpPr/>
+          <p:nvPr/>
+        </p:nvSpPr>
+        <p:spPr>
+          <a:xfrm>
+            <a:off x="3310128" y="3840479"/>
+            <a:ext cx="2743200" cy="2633472"/>
+          </a:xfrm>
+          <a:prstGeom prst="rect">
+            <a:avLst/>
+          </a:prstGeom>
+          <a:solidFill>
+            <a:srgbClr val="161A22"/>
+          </a:solidFill>
+          <a:ln>
+            <a:noFill/>
+          </a:ln>
+        </p:spPr>
+        <p:style>
+          <a:lnRef idx="1">
+            <a:schemeClr val="accent1"/>
+          </a:lnRef>
+          <a:fillRef idx="3">
+            <a:schemeClr val="accent1"/>
+          </a:fillRef>
+          <a:effectRef idx="2">
+            <a:schemeClr val="accent1"/>
+          </a:effectRef>
+          <a:fontRef idx="minor">
+            <a:schemeClr val="lt1"/>
+          </a:fontRef>
+        </p:style>
+        <p:txBody>
+          <a:bodyPr rtlCol="0" anchor="ctr"/>
+          <a:lstStyle/>
+          <a:p>
+            <a:pPr algn="ctr"/>
+          </a:p>
+        </p:txBody>
+      </p:sp>
+      <p:sp>
+        <p:nvSpPr>
+          <p:cNvPr id="39" name="Rectangle 38"/>
+          <p:cNvSpPr/>
+          <p:nvPr/>
+        </p:nvSpPr>
+        <p:spPr>
+          <a:xfrm>
+            <a:off x="3310128" y="3840479"/>
+            <a:ext cx="2743200" cy="45720"/>
+          </a:xfrm>
+          <a:prstGeom prst="rect">
+            <a:avLst/>
+          </a:prstGeom>
+          <a:solidFill>
+            <a:srgbClr val="4ABFF0"/>
+          </a:solidFill>
+          <a:ln>
+            <a:noFill/>
+          </a:ln>
+        </p:spPr>
+        <p:style>
+          <a:lnRef idx="1">
+            <a:schemeClr val="accent1"/>
+          </a:lnRef>
+          <a:fillRef idx="3">
+            <a:schemeClr val="accent1"/>
+          </a:fillRef>
+          <a:effectRef idx="2">
+            <a:schemeClr val="accent1"/>
+          </a:effectRef>
+          <a:fontRef idx="minor">
+            <a:schemeClr val="lt1"/>
+          </a:fontRef>
+        </p:style>
+        <p:txBody>
+          <a:bodyPr rtlCol="0" anchor="ctr"/>
+          <a:lstStyle/>
+          <a:p>
+            <a:pPr algn="ctr"/>
+          </a:p>
+        </p:txBody>
+      </p:sp>
+      <p:sp>
+        <p:nvSpPr>
+          <p:cNvPr id="40" name="TextBox 39"/>
+          <p:cNvSpPr txBox="1"/>
+          <p:nvPr/>
+        </p:nvSpPr>
+        <p:spPr>
+          <a:xfrm>
+            <a:off x="3419856" y="3931919"/>
+            <a:ext cx="2514600" cy="347472"/>
+          </a:xfrm>
+          <a:prstGeom prst="rect">
+            <a:avLst/>
+          </a:prstGeom>
+          <a:noFill/>
+        </p:spPr>
+        <p:txBody>
+          <a:bodyPr wrap="square">
+            <a:spAutoFit/>
+          </a:bodyPr>
+          <a:lstStyle/>
+          <a:p>
+            <a:pPr algn="l"/>
+            <a:r>
+              <a:rPr sz="1100" b="1" i="0">
+                <a:solidFill>
+                  <a:srgbClr val="FFFFFF"/>
+                </a:solidFill>
+                <a:latin typeface="Segoe UI"/>
+              </a:rPr>
+              <a:t>BackcheckRecord</a:t>
+            </a:r>
+          </a:p>
+        </p:txBody>
+      </p:sp>
+      <p:sp>
+        <p:nvSpPr>
+          <p:cNvPr id="41" name="TextBox 40"/>
+          <p:cNvSpPr txBox="1"/>
+          <p:nvPr/>
+        </p:nvSpPr>
+        <p:spPr>
+          <a:xfrm>
+            <a:off x="3419856" y="4370831"/>
+            <a:ext cx="2514600" cy="566928"/>
+          </a:xfrm>
+          <a:prstGeom prst="rect">
+            <a:avLst/>
+          </a:prstGeom>
+          <a:noFill/>
+        </p:spPr>
+        <p:txBody>
+          <a:bodyPr wrap="square">
+            <a:spAutoFit/>
+          </a:bodyPr>
+          <a:lstStyle/>
+          <a:p>
+            <a:pPr algn="l"/>
+            <a:r>
+              <a:rPr sz="900" b="0" i="0">
+                <a:solidFill>
+                  <a:srgbClr val="8896A8"/>
+                </a:solidFill>
+                <a:latin typeface="Segoe UI"/>
+              </a:rPr>
+              <a:t>· interviewer_id → Interviewer</a:t>
+            </a:r>
+          </a:p>
+        </p:txBody>
+      </p:sp>
+      <p:sp>
+        <p:nvSpPr>
+          <p:cNvPr id="42" name="TextBox 41"/>
+          <p:cNvSpPr txBox="1"/>
+          <p:nvPr/>
+        </p:nvSpPr>
+        <p:spPr>
+          <a:xfrm>
+            <a:off x="3419856" y="4992623"/>
+            <a:ext cx="2514600" cy="566928"/>
+          </a:xfrm>
+          <a:prstGeom prst="rect">
+            <a:avLst/>
+          </a:prstGeom>
+          <a:noFill/>
+        </p:spPr>
+        <p:txBody>
+          <a:bodyPr wrap="square">
+            <a:spAutoFit/>
+          </a:bodyPr>
+          <a:lstStyle/>
+          <a:p>
+            <a:pPr algn="l"/>
+            <a:r>
+              <a:rPr sz="900" b="0" i="0">
+                <a:solidFill>
+                  <a:srgbClr val="8896A8"/>
+                </a:solidFill>
+                <a:latin typeface="Segoe UI"/>
+              </a:rPr>
+              <a:t>· project_id, bc_date</a:t>
+            </a:r>
+          </a:p>
+        </p:txBody>
+      </p:sp>
+      <p:sp>
+        <p:nvSpPr>
+          <p:cNvPr id="43" name="TextBox 42"/>
+          <p:cNvSpPr txBox="1"/>
+          <p:nvPr/>
+        </p:nvSpPr>
+        <p:spPr>
+          <a:xfrm>
+            <a:off x="3419856" y="5614416"/>
+            <a:ext cx="2514600" cy="566928"/>
+          </a:xfrm>
+          <a:prstGeom prst="rect">
+            <a:avLst/>
+          </a:prstGeom>
+          <a:noFill/>
+        </p:spPr>
+        <p:txBody>
+          <a:bodyPr wrap="square">
+            <a:spAutoFit/>
+          </a:bodyPr>
+          <a:lstStyle/>
+          <a:p>
+            <a:pPr algn="l"/>
+            <a:r>
+              <a:rPr sz="900" b="0" i="0">
+                <a:solidFill>
+                  <a:srgbClr val="8896A8"/>
+                </a:solidFill>
+                <a:latin typeface="Segoe UI"/>
+              </a:rPr>
+              <a:t>· total_errors, outcome</a:t>
+            </a:r>
+          </a:p>
+        </p:txBody>
+      </p:sp>
+      <p:sp>
+        <p:nvSpPr>
+          <p:cNvPr id="44" name="Rectangle 43"/>
+          <p:cNvSpPr/>
+          <p:nvPr/>
+        </p:nvSpPr>
+        <p:spPr>
+          <a:xfrm>
+            <a:off x="6254496" y="3840479"/>
+            <a:ext cx="2743200" cy="2633472"/>
+          </a:xfrm>
+          <a:prstGeom prst="rect">
+            <a:avLst/>
+          </a:prstGeom>
+          <a:solidFill>
+            <a:srgbClr val="161A22"/>
+          </a:solidFill>
+          <a:ln>
+            <a:noFill/>
+          </a:ln>
+        </p:spPr>
+        <p:style>
+          <a:lnRef idx="1">
+            <a:schemeClr val="accent1"/>
+          </a:lnRef>
+          <a:fillRef idx="3">
+            <a:schemeClr val="accent1"/>
+          </a:fillRef>
+          <a:effectRef idx="2">
+            <a:schemeClr val="accent1"/>
+          </a:effectRef>
+          <a:fontRef idx="minor">
+            <a:schemeClr val="lt1"/>
+          </a:fontRef>
+        </p:style>
+        <p:txBody>
+          <a:bodyPr rtlCol="0" anchor="ctr"/>
+          <a:lstStyle/>
+          <a:p>
+            <a:pPr algn="ctr"/>
+          </a:p>
+        </p:txBody>
+      </p:sp>
+      <p:sp>
+        <p:nvSpPr>
+          <p:cNvPr id="45" name="Rectangle 44"/>
+          <p:cNvSpPr/>
+          <p:nvPr/>
+        </p:nvSpPr>
+        <p:spPr>
+          <a:xfrm>
+            <a:off x="6254496" y="3840479"/>
+            <a:ext cx="2743200" cy="45720"/>
+          </a:xfrm>
+          <a:prstGeom prst="rect">
+            <a:avLst/>
+          </a:prstGeom>
+          <a:solidFill>
+            <a:srgbClr val="A078F0"/>
+          </a:solidFill>
+          <a:ln>
+            <a:noFill/>
+          </a:ln>
+        </p:spPr>
+        <p:style>
+          <a:lnRef idx="1">
+            <a:schemeClr val="accent1"/>
+          </a:lnRef>
+          <a:fillRef idx="3">
+            <a:schemeClr val="accent1"/>
+          </a:fillRef>
+          <a:effectRef idx="2">
+            <a:schemeClr val="accent1"/>
+          </a:effectRef>
+          <a:fontRef idx="minor">
+            <a:schemeClr val="lt1"/>
+          </a:fontRef>
+        </p:style>
+        <p:txBody>
+          <a:bodyPr rtlCol="0" anchor="ctr"/>
+          <a:lstStyle/>
+          <a:p>
+            <a:pPr algn="ctr"/>
+          </a:p>
+        </p:txBody>
+      </p:sp>
+      <p:sp>
+        <p:nvSpPr>
+          <p:cNvPr id="46" name="TextBox 45"/>
+          <p:cNvSpPr txBox="1"/>
+          <p:nvPr/>
+        </p:nvSpPr>
+        <p:spPr>
+          <a:xfrm>
+            <a:off x="6364224" y="3931919"/>
+            <a:ext cx="2514600" cy="347472"/>
+          </a:xfrm>
+          <a:prstGeom prst="rect">
+            <a:avLst/>
+          </a:prstGeom>
+          <a:noFill/>
+        </p:spPr>
+        <p:txBody>
+          <a:bodyPr wrap="square">
+            <a:spAutoFit/>
+          </a:bodyPr>
+          <a:lstStyle/>
+          <a:p>
+            <a:pPr algn="l"/>
+            <a:r>
+              <a:rPr sz="1100" b="1" i="0">
+                <a:solidFill>
+                  <a:srgbClr val="FFFFFF"/>
+                </a:solidFill>
+                <a:latin typeface="Segoe UI"/>
+              </a:rPr>
+              <a:t>ListenInRecord</a:t>
+            </a:r>
+          </a:p>
+        </p:txBody>
+      </p:sp>
+      <p:sp>
+        <p:nvSpPr>
+          <p:cNvPr id="47" name="TextBox 46"/>
+          <p:cNvSpPr txBox="1"/>
+          <p:nvPr/>
+        </p:nvSpPr>
+        <p:spPr>
+          <a:xfrm>
+            <a:off x="6364224" y="4370831"/>
+            <a:ext cx="2514600" cy="566928"/>
+          </a:xfrm>
+          <a:prstGeom prst="rect">
+            <a:avLst/>
+          </a:prstGeom>
+          <a:noFill/>
+        </p:spPr>
+        <p:txBody>
+          <a:bodyPr wrap="square">
+            <a:spAutoFit/>
+          </a:bodyPr>
+          <a:lstStyle/>
+          <a:p>
+            <a:pPr algn="l"/>
+            <a:r>
+              <a:rPr sz="900" b="0" i="0">
+                <a:solidFill>
+                  <a:srgbClr val="8896A8"/>
+                </a:solidFill>
+                <a:latin typeface="Segoe UI"/>
+              </a:rPr>
+              <a:t>· interviewer_id → Interviewer</a:t>
+            </a:r>
+          </a:p>
+        </p:txBody>
+      </p:sp>
+      <p:sp>
+        <p:nvSpPr>
+          <p:cNvPr id="48" name="TextBox 47"/>
+          <p:cNvSpPr txBox="1"/>
+          <p:nvPr/>
+        </p:nvSpPr>
+        <p:spPr>
+          <a:xfrm>
+            <a:off x="6364224" y="4992623"/>
+            <a:ext cx="2514600" cy="566928"/>
+          </a:xfrm>
+          <a:prstGeom prst="rect">
+            <a:avLst/>
+          </a:prstGeom>
+          <a:noFill/>
+        </p:spPr>
+        <p:txBody>
+          <a:bodyPr wrap="square">
+            <a:spAutoFit/>
+          </a:bodyPr>
+          <a:lstStyle/>
+          <a:p>
+            <a:pPr algn="l"/>
+            <a:r>
+              <a:rPr sz="900" b="0" i="0">
+                <a:solidFill>
+                  <a:srgbClr val="8896A8"/>
+                </a:solidFill>
+                <a:latin typeface="Segoe UI"/>
+              </a:rPr>
+              <a:t>· project_id, li_date</a:t>
+            </a:r>
+          </a:p>
+        </p:txBody>
+      </p:sp>
+      <p:sp>
+        <p:nvSpPr>
+          <p:cNvPr id="49" name="TextBox 48"/>
+          <p:cNvSpPr txBox="1"/>
+          <p:nvPr/>
+        </p:nvSpPr>
+        <p:spPr>
+          <a:xfrm>
+            <a:off x="6364224" y="5614416"/>
+            <a:ext cx="2514600" cy="566928"/>
+          </a:xfrm>
+          <a:prstGeom prst="rect">
+            <a:avLst/>
+          </a:prstGeom>
+          <a:noFill/>
+        </p:spPr>
+        <p:txBody>
+          <a:bodyPr wrap="square">
+            <a:spAutoFit/>
+          </a:bodyPr>
+          <a:lstStyle/>
+          <a:p>
+            <a:pPr algn="l"/>
+            <a:r>
+              <a:rPr sz="900" b="0" i="0">
+                <a:solidFill>
+                  <a:srgbClr val="8896A8"/>
+                </a:solidFill>
+                <a:latin typeface="Segoe UI"/>
+              </a:rPr>
+              <a:t>· pass_fail, supervisor_id → User</a:t>
+            </a:r>
+          </a:p>
+        </p:txBody>
+      </p:sp>
+      <p:sp>
+        <p:nvSpPr>
+          <p:cNvPr id="50" name="Rectangle 49"/>
+          <p:cNvSpPr/>
+          <p:nvPr/>
+        </p:nvSpPr>
+        <p:spPr>
+          <a:xfrm>
+            <a:off x="9198864" y="3840479"/>
+            <a:ext cx="2743200" cy="2633472"/>
+          </a:xfrm>
+          <a:prstGeom prst="rect">
+            <a:avLst/>
+          </a:prstGeom>
+          <a:solidFill>
+            <a:srgbClr val="161A22"/>
+          </a:solidFill>
+          <a:ln>
+            <a:noFill/>
+          </a:ln>
+        </p:spPr>
+        <p:style>
+          <a:lnRef idx="1">
+            <a:schemeClr val="accent1"/>
+          </a:lnRef>
+          <a:fillRef idx="3">
+            <a:schemeClr val="accent1"/>
+          </a:fillRef>
+          <a:effectRef idx="2">
+            <a:schemeClr val="accent1"/>
+          </a:effectRef>
+          <a:fontRef idx="minor">
+            <a:schemeClr val="lt1"/>
+          </a:fontRef>
+        </p:style>
+        <p:txBody>
+          <a:bodyPr rtlCol="0" anchor="ctr"/>
+          <a:lstStyle/>
+          <a:p>
+            <a:pPr algn="ctr"/>
+          </a:p>
+        </p:txBody>
+      </p:sp>
+      <p:sp>
+        <p:nvSpPr>
+          <p:cNvPr id="51" name="Rectangle 50"/>
+          <p:cNvSpPr/>
+          <p:nvPr/>
+        </p:nvSpPr>
+        <p:spPr>
+          <a:xfrm>
+            <a:off x="9198864" y="3840479"/>
+            <a:ext cx="2743200" cy="45720"/>
+          </a:xfrm>
+          <a:prstGeom prst="rect">
+            <a:avLst/>
+          </a:prstGeom>
+          <a:solidFill>
+            <a:srgbClr val="8896A8"/>
+          </a:solidFill>
+          <a:ln>
+            <a:noFill/>
+          </a:ln>
+        </p:spPr>
+        <p:style>
+          <a:lnRef idx="1">
+            <a:schemeClr val="accent1"/>
+          </a:lnRef>
+          <a:fillRef idx="3">
+            <a:schemeClr val="accent1"/>
+          </a:fillRef>
+          <a:effectRef idx="2">
+            <a:schemeClr val="accent1"/>
+          </a:effectRef>
+          <a:fontRef idx="minor">
+            <a:schemeClr val="lt1"/>
+          </a:fontRef>
+        </p:style>
+        <p:txBody>
+          <a:bodyPr rtlCol="0" anchor="ctr"/>
+          <a:lstStyle/>
+          <a:p>
+            <a:pPr algn="ctr"/>
+          </a:p>
+        </p:txBody>
+      </p:sp>
+      <p:sp>
+        <p:nvSpPr>
+          <p:cNvPr id="52" name="TextBox 51"/>
+          <p:cNvSpPr txBox="1"/>
+          <p:nvPr/>
+        </p:nvSpPr>
+        <p:spPr>
+          <a:xfrm>
+            <a:off x="9308592" y="3931919"/>
+            <a:ext cx="2514600" cy="347472"/>
+          </a:xfrm>
+          <a:prstGeom prst="rect">
+            <a:avLst/>
+          </a:prstGeom>
+          <a:noFill/>
+        </p:spPr>
+        <p:txBody>
+          <a:bodyPr wrap="square">
+            <a:spAutoFit/>
+          </a:bodyPr>
+          <a:lstStyle/>
+          <a:p>
+            <a:pPr algn="l"/>
+            <a:r>
+              <a:rPr sz="1100" b="1" i="0">
+                <a:solidFill>
+                  <a:srgbClr val="FFFFFF"/>
+                </a:solidFill>
+                <a:latin typeface="Segoe UI"/>
+              </a:rPr>
+              <a:t>CancelledInterview</a:t>
+            </a:r>
+          </a:p>
+        </p:txBody>
+      </p:sp>
+      <p:sp>
+        <p:nvSpPr>
+          <p:cNvPr id="53" name="TextBox 52"/>
+          <p:cNvSpPr txBox="1"/>
+          <p:nvPr/>
+        </p:nvSpPr>
+        <p:spPr>
+          <a:xfrm>
+            <a:off x="9308592" y="4370831"/>
+            <a:ext cx="2514600" cy="566928"/>
+          </a:xfrm>
+          <a:prstGeom prst="rect">
+            <a:avLst/>
+          </a:prstGeom>
+          <a:noFill/>
+        </p:spPr>
+        <p:txBody>
+          <a:bodyPr wrap="square">
+            <a:spAutoFit/>
+          </a:bodyPr>
+          <a:lstStyle/>
+          <a:p>
+            <a:pPr algn="l"/>
+            <a:r>
+              <a:rPr sz="900" b="0" i="0">
+                <a:solidFill>
+                  <a:srgbClr val="8896A8"/>
+                </a:solidFill>
+                <a:latin typeface="Segoe UI"/>
+              </a:rPr>
+              <a:t>· interviewer_id → Interviewer</a:t>
+            </a:r>
+          </a:p>
+        </p:txBody>
+      </p:sp>
+      <p:sp>
+        <p:nvSpPr>
+          <p:cNvPr id="54" name="TextBox 53"/>
+          <p:cNvSpPr txBox="1"/>
+          <p:nvPr/>
+        </p:nvSpPr>
+        <p:spPr>
+          <a:xfrm>
+            <a:off x="9308592" y="4992623"/>
+            <a:ext cx="2514600" cy="566928"/>
+          </a:xfrm>
+          <a:prstGeom prst="rect">
+            <a:avLst/>
+          </a:prstGeom>
+          <a:noFill/>
+        </p:spPr>
+        <p:txBody>
+          <a:bodyPr wrap="square">
+            <a:spAutoFit/>
+          </a:bodyPr>
+          <a:lstStyle/>
+          <a:p>
+            <a:pPr algn="l"/>
+            <a:r>
+              <a:rPr sz="900" b="0" i="0">
+                <a:solidFill>
+                  <a:srgbClr val="8896A8"/>
+                </a:solidFill>
+                <a:latin typeface="Segoe UI"/>
+              </a:rPr>
+              <a:t>· project_id, cancel_date</a:t>
+            </a:r>
+          </a:p>
+        </p:txBody>
+      </p:sp>
+      <p:sp>
+        <p:nvSpPr>
+          <p:cNvPr id="55" name="TextBox 54"/>
+          <p:cNvSpPr txBox="1"/>
+          <p:nvPr/>
+        </p:nvSpPr>
+        <p:spPr>
+          <a:xfrm>
+            <a:off x="9308592" y="5614416"/>
+            <a:ext cx="2514600" cy="566928"/>
+          </a:xfrm>
+          <a:prstGeom prst="rect">
+            <a:avLst/>
+          </a:prstGeom>
+          <a:noFill/>
+        </p:spPr>
+        <p:txBody>
+          <a:bodyPr wrap="square">
+            <a:spAutoFit/>
+          </a:bodyPr>
+          <a:lstStyle/>
+          <a:p>
+            <a:pPr algn="l"/>
+            <a:r>
+              <a:rPr sz="900" b="0" i="0">
+                <a:solidFill>
+                  <a:srgbClr val="8896A8"/>
+                </a:solidFill>
+                <a:latin typeface="Segoe UI"/>
+              </a:rPr>
+              <a:t>· reason_code, notes</a:t>
+            </a:r>
+          </a:p>
+        </p:txBody>
+      </p:sp>
+    </p:spTree>
+  </p:cSld>
+  <p:clrMapOvr>
+    <a:masterClrMapping/>
+  </p:clrMapOvr>
+</p:sld>
+</file>
+
+<file path=ppt/slides/slide22.xml><?xml version="1.0" encoding="utf-8"?>
+<p:sld xmlns:a="http://schemas.openxmlformats.org/drawingml/2006/main" xmlns:p="http://schemas.openxmlformats.org/presentationml/2006/main" xmlns:r="http://schemas.openxmlformats.org/officeDocument/2006/relationships">
+  <p:cSld>
+    <p:bg>
+      <p:bgPr>
+        <a:solidFill>
+          <a:srgbClr val="0E1014"/>
+        </a:solidFill>
+        <a:effectLst/>
+      </p:bgPr>
+    </p:bg>
+    <p:spTree>
+      <p:nvGrpSpPr>
+        <p:cNvPr id="1" name=""/>
+        <p:cNvGrpSpPr/>
+        <p:nvPr/>
+      </p:nvGrpSpPr>
+      <p:grpSpPr/>
+      <p:sp>
+        <p:nvSpPr>
+          <p:cNvPr id="2" name="Rectangle 1"/>
+          <p:cNvSpPr/>
+          <p:nvPr/>
+        </p:nvSpPr>
+        <p:spPr>
+          <a:xfrm>
+            <a:off x="0" y="0"/>
+            <a:ext cx="12188952" cy="54864"/>
+          </a:xfrm>
+          <a:prstGeom prst="rect">
+            <a:avLst/>
+          </a:prstGeom>
+          <a:solidFill>
+            <a:srgbClr val="4AF0A0"/>
+          </a:solidFill>
+          <a:ln>
+            <a:noFill/>
+          </a:ln>
+        </p:spPr>
+        <p:style>
+          <a:lnRef idx="1">
+            <a:schemeClr val="accent1"/>
+          </a:lnRef>
+          <a:fillRef idx="3">
+            <a:schemeClr val="accent1"/>
+          </a:fillRef>
+          <a:effectRef idx="2">
+            <a:schemeClr val="accent1"/>
+          </a:effectRef>
+          <a:fontRef idx="minor">
+            <a:schemeClr val="lt1"/>
+          </a:fontRef>
+        </p:style>
+        <p:txBody>
+          <a:bodyPr rtlCol="0" anchor="ctr"/>
+          <a:lstStyle/>
+          <a:p>
+            <a:pPr algn="ctr"/>
+          </a:p>
+        </p:txBody>
+      </p:sp>
+      <p:sp>
+        <p:nvSpPr>
+          <p:cNvPr id="3" name="TextBox 2"/>
+          <p:cNvSpPr txBox="1"/>
+          <p:nvPr/>
+        </p:nvSpPr>
+        <p:spPr>
+          <a:xfrm>
+            <a:off x="457200" y="146304"/>
+            <a:ext cx="9144000" cy="548640"/>
+          </a:xfrm>
+          <a:prstGeom prst="rect">
+            <a:avLst/>
+          </a:prstGeom>
+          <a:noFill/>
+        </p:spPr>
+        <p:txBody>
+          <a:bodyPr wrap="square">
+            <a:spAutoFit/>
+          </a:bodyPr>
+          <a:lstStyle/>
+          <a:p>
+            <a:pPr algn="l"/>
+            <a:r>
+              <a:rPr sz="2600" b="1" i="0">
+                <a:solidFill>
+                  <a:srgbClr val="FFFFFF"/>
+                </a:solidFill>
+                <a:latin typeface="Segoe UI"/>
+              </a:rPr>
+              <a:t>Dashboard Auth + Deployment</a:t>
+            </a:r>
+          </a:p>
+        </p:txBody>
+      </p:sp>
+      <p:sp>
+        <p:nvSpPr>
+          <p:cNvPr id="4" name="TextBox 3"/>
+          <p:cNvSpPr txBox="1"/>
+          <p:nvPr/>
+        </p:nvSpPr>
+        <p:spPr>
+          <a:xfrm>
+            <a:off x="457200" y="640080"/>
+            <a:ext cx="10972800" cy="365760"/>
+          </a:xfrm>
+          <a:prstGeom prst="rect">
+            <a:avLst/>
+          </a:prstGeom>
+          <a:noFill/>
+        </p:spPr>
+        <p:txBody>
+          <a:bodyPr wrap="square">
+            <a:spAutoFit/>
+          </a:bodyPr>
+          <a:lstStyle/>
+          <a:p>
+            <a:pPr algn="l"/>
+            <a:r>
+              <a:rPr sz="1200" b="0" i="0">
+                <a:solidFill>
+                  <a:srgbClr val="8896A8"/>
+                </a:solidFill>
+                <a:latin typeface="Segoe UI"/>
+              </a:rPr>
+              <a:t>JWT auth  ·  Fly.io deployment  ·  shared_db.py bridge</a:t>
+            </a:r>
+          </a:p>
+        </p:txBody>
+      </p:sp>
+      <p:sp>
+        <p:nvSpPr>
+          <p:cNvPr id="5" name="Rectangle 4"/>
+          <p:cNvSpPr/>
+          <p:nvPr/>
+        </p:nvSpPr>
+        <p:spPr>
+          <a:xfrm>
+            <a:off x="457200" y="950976"/>
+            <a:ext cx="11274552" cy="18288"/>
+          </a:xfrm>
+          <a:prstGeom prst="rect">
+            <a:avLst/>
+          </a:prstGeom>
+          <a:solidFill>
+            <a:srgbClr val="161A22"/>
+          </a:solidFill>
+          <a:ln>
+            <a:noFill/>
+          </a:ln>
+        </p:spPr>
+        <p:style>
+          <a:lnRef idx="1">
+            <a:schemeClr val="accent1"/>
+          </a:lnRef>
+          <a:fillRef idx="3">
+            <a:schemeClr val="accent1"/>
+          </a:fillRef>
+          <a:effectRef idx="2">
+            <a:schemeClr val="accent1"/>
+          </a:effectRef>
+          <a:fontRef idx="minor">
+            <a:schemeClr val="lt1"/>
+          </a:fontRef>
+        </p:style>
+        <p:txBody>
+          <a:bodyPr rtlCol="0" anchor="ctr"/>
+          <a:lstStyle/>
+          <a:p>
+            <a:pPr algn="ctr"/>
+          </a:p>
+        </p:txBody>
+      </p:sp>
+      <p:sp>
+        <p:nvSpPr>
+          <p:cNvPr id="6" name="Rectangle 5"/>
+          <p:cNvSpPr/>
+          <p:nvPr/>
+        </p:nvSpPr>
+        <p:spPr>
+          <a:xfrm>
+            <a:off x="457200" y="1051560"/>
+            <a:ext cx="5394960" cy="5349240"/>
+          </a:xfrm>
+          <a:prstGeom prst="rect">
+            <a:avLst/>
+          </a:prstGeom>
+          <a:solidFill>
+            <a:srgbClr val="161A22"/>
+          </a:solidFill>
+          <a:ln>
+            <a:noFill/>
+          </a:ln>
+        </p:spPr>
+        <p:style>
+          <a:lnRef idx="1">
+            <a:schemeClr val="accent1"/>
+          </a:lnRef>
+          <a:fillRef idx="3">
+            <a:schemeClr val="accent1"/>
+          </a:fillRef>
+          <a:effectRef idx="2">
+            <a:schemeClr val="accent1"/>
+          </a:effectRef>
+          <a:fontRef idx="minor">
+            <a:schemeClr val="lt1"/>
+          </a:fontRef>
+        </p:style>
+        <p:txBody>
+          <a:bodyPr rtlCol="0" anchor="ctr"/>
+          <a:lstStyle/>
+          <a:p>
+            <a:pPr algn="ctr"/>
+          </a:p>
+        </p:txBody>
+      </p:sp>
+      <p:sp>
+        <p:nvSpPr>
+          <p:cNvPr id="7" name="Rectangle 6"/>
+          <p:cNvSpPr/>
+          <p:nvPr/>
+        </p:nvSpPr>
+        <p:spPr>
+          <a:xfrm>
+            <a:off x="457200" y="1051560"/>
+            <a:ext cx="5394960" cy="54864"/>
+          </a:xfrm>
+          <a:prstGeom prst="rect">
+            <a:avLst/>
+          </a:prstGeom>
+          <a:solidFill>
+            <a:srgbClr val="4AF0A0"/>
+          </a:solidFill>
+          <a:ln>
+            <a:noFill/>
+          </a:ln>
+        </p:spPr>
+        <p:style>
+          <a:lnRef idx="1">
+            <a:schemeClr val="accent1"/>
+          </a:lnRef>
+          <a:fillRef idx="3">
+            <a:schemeClr val="accent1"/>
+          </a:fillRef>
+          <a:effectRef idx="2">
+            <a:schemeClr val="accent1"/>
+          </a:effectRef>
+          <a:fontRef idx="minor">
+            <a:schemeClr val="lt1"/>
+          </a:fontRef>
+        </p:style>
+        <p:txBody>
+          <a:bodyPr rtlCol="0" anchor="ctr"/>
+          <a:lstStyle/>
+          <a:p>
+            <a:pPr algn="ctr"/>
+          </a:p>
+        </p:txBody>
+      </p:sp>
+      <p:sp>
+        <p:nvSpPr>
+          <p:cNvPr id="8" name="TextBox 7"/>
+          <p:cNvSpPr txBox="1"/>
+          <p:nvPr/>
+        </p:nvSpPr>
+        <p:spPr>
+          <a:xfrm>
+            <a:off x="640080" y="1170432"/>
+            <a:ext cx="5029200" cy="384048"/>
+          </a:xfrm>
+          <a:prstGeom prst="rect">
+            <a:avLst/>
+          </a:prstGeom>
+          <a:noFill/>
+        </p:spPr>
+        <p:txBody>
+          <a:bodyPr wrap="square">
+            <a:spAutoFit/>
+          </a:bodyPr>
+          <a:lstStyle/>
+          <a:p>
+            <a:pPr algn="l"/>
+            <a:r>
+              <a:rPr sz="1400" b="1" i="0">
+                <a:solidFill>
+                  <a:srgbClr val="FFFFFF"/>
+                </a:solidFill>
+                <a:latin typeface="Segoe UI"/>
+              </a:rPr>
+              <a:t>Authentication Flow</a:t>
+            </a:r>
+          </a:p>
+        </p:txBody>
+      </p:sp>
+      <p:sp>
+        <p:nvSpPr>
+          <p:cNvPr id="9" name="TextBox 8"/>
+          <p:cNvSpPr txBox="1"/>
+          <p:nvPr/>
+        </p:nvSpPr>
+        <p:spPr>
+          <a:xfrm>
+            <a:off x="640080" y="1600200"/>
+            <a:ext cx="1828800" cy="320040"/>
+          </a:xfrm>
+          <a:prstGeom prst="rect">
+            <a:avLst/>
+          </a:prstGeom>
+          <a:noFill/>
+        </p:spPr>
+        <p:txBody>
+          <a:bodyPr wrap="square">
+            <a:spAutoFit/>
+          </a:bodyPr>
+          <a:lstStyle/>
+          <a:p>
+            <a:pPr algn="l"/>
+            <a:r>
+              <a:rPr sz="1000" b="1" i="0">
+                <a:solidFill>
+                  <a:srgbClr val="4AF0A0"/>
+                </a:solidFill>
+                <a:latin typeface="Segoe UI"/>
+              </a:rPr>
+              <a:t>Login</a:t>
+            </a:r>
+          </a:p>
+        </p:txBody>
+      </p:sp>
+      <p:sp>
+        <p:nvSpPr>
+          <p:cNvPr id="10" name="TextBox 9"/>
+          <p:cNvSpPr txBox="1"/>
+          <p:nvPr/>
+        </p:nvSpPr>
+        <p:spPr>
+          <a:xfrm>
+            <a:off x="2514600" y="1600200"/>
+            <a:ext cx="3246120" cy="685800"/>
+          </a:xfrm>
+          <a:prstGeom prst="rect">
+            <a:avLst/>
+          </a:prstGeom>
+          <a:noFill/>
+        </p:spPr>
+        <p:txBody>
+          <a:bodyPr wrap="square">
+            <a:spAutoFit/>
+          </a:bodyPr>
+          <a:lstStyle/>
+          <a:p>
+            <a:pPr algn="l"/>
+            <a:r>
+              <a:rPr sz="1000" b="0" i="0">
+                <a:solidFill>
+                  <a:srgbClr val="8896A8"/>
+                </a:solidFill>
+                <a:latin typeface="Segoe UI"/>
+              </a:rPr>
+              <a:t>POST /api/auth/login → returns JWT access token (24h TTL)</a:t>
+            </a:r>
+          </a:p>
+        </p:txBody>
+      </p:sp>
+      <p:sp>
+        <p:nvSpPr>
+          <p:cNvPr id="11" name="TextBox 10"/>
+          <p:cNvSpPr txBox="1"/>
+          <p:nvPr/>
+        </p:nvSpPr>
+        <p:spPr>
+          <a:xfrm>
+            <a:off x="640080" y="2423160"/>
+            <a:ext cx="1828800" cy="320040"/>
+          </a:xfrm>
+          <a:prstGeom prst="rect">
+            <a:avLst/>
+          </a:prstGeom>
+          <a:noFill/>
+        </p:spPr>
+        <p:txBody>
+          <a:bodyPr wrap="square">
+            <a:spAutoFit/>
+          </a:bodyPr>
+          <a:lstStyle/>
+          <a:p>
+            <a:pPr algn="l"/>
+            <a:r>
+              <a:rPr sz="1000" b="1" i="0">
+                <a:solidFill>
+                  <a:srgbClr val="4AF0A0"/>
+                </a:solidFill>
+                <a:latin typeface="Segoe UI"/>
+              </a:rPr>
+              <a:t>Token storage</a:t>
+            </a:r>
+          </a:p>
+        </p:txBody>
+      </p:sp>
+      <p:sp>
+        <p:nvSpPr>
+          <p:cNvPr id="12" name="TextBox 11"/>
+          <p:cNvSpPr txBox="1"/>
+          <p:nvPr/>
+        </p:nvSpPr>
+        <p:spPr>
+          <a:xfrm>
+            <a:off x="2514600" y="2423160"/>
+            <a:ext cx="3246120" cy="685800"/>
+          </a:xfrm>
+          <a:prstGeom prst="rect">
+            <a:avLst/>
+          </a:prstGeom>
+          <a:noFill/>
+        </p:spPr>
+        <p:txBody>
+          <a:bodyPr wrap="square">
+            <a:spAutoFit/>
+          </a:bodyPr>
+          <a:lstStyle/>
+          <a:p>
+            <a:pPr algn="l"/>
+            <a:r>
+              <a:rPr sz="1000" b="0" i="0">
+                <a:solidFill>
+                  <a:srgbClr val="8896A8"/>
+                </a:solidFill>
+                <a:latin typeface="Segoe UI"/>
+              </a:rPr>
+              <a:t>React: localStorage key ds_auth_token. Sent as Bearer header on every API call.</a:t>
+            </a:r>
+          </a:p>
+        </p:txBody>
+      </p:sp>
+      <p:sp>
+        <p:nvSpPr>
+          <p:cNvPr id="13" name="TextBox 12"/>
+          <p:cNvSpPr txBox="1"/>
+          <p:nvPr/>
+        </p:nvSpPr>
+        <p:spPr>
+          <a:xfrm>
+            <a:off x="640080" y="3246120"/>
+            <a:ext cx="1828800" cy="320040"/>
+          </a:xfrm>
+          <a:prstGeom prst="rect">
+            <a:avLst/>
+          </a:prstGeom>
+          <a:noFill/>
+        </p:spPr>
+        <p:txBody>
+          <a:bodyPr wrap="square">
+            <a:spAutoFit/>
+          </a:bodyPr>
+          <a:lstStyle/>
+          <a:p>
+            <a:pPr algn="l"/>
+            <a:r>
+              <a:rPr sz="1000" b="1" i="0">
+                <a:solidFill>
+                  <a:srgbClr val="4AF0A0"/>
+                </a:solidFill>
+                <a:latin typeface="Segoe UI"/>
+              </a:rPr>
+              <a:t>Role check</a:t>
+            </a:r>
+          </a:p>
+        </p:txBody>
+      </p:sp>
+      <p:sp>
+        <p:nvSpPr>
+          <p:cNvPr id="14" name="TextBox 13"/>
+          <p:cNvSpPr txBox="1"/>
+          <p:nvPr/>
+        </p:nvSpPr>
+        <p:spPr>
+          <a:xfrm>
+            <a:off x="2514600" y="3246120"/>
+            <a:ext cx="3246120" cy="685800"/>
+          </a:xfrm>
+          <a:prstGeom prst="rect">
+            <a:avLst/>
+          </a:prstGeom>
+          <a:noFill/>
+        </p:spPr>
+        <p:txBody>
+          <a:bodyPr wrap="square">
+            <a:spAutoFit/>
+          </a:bodyPr>
+          <a:lstStyle/>
+          <a:p>
+            <a:pPr algn="l"/>
+            <a:r>
+              <a:rPr sz="1000" b="0" i="0">
+                <a:solidFill>
+                  <a:srgbClr val="8896A8"/>
+                </a:solidFill>
+                <a:latin typeface="Segoe UI"/>
+              </a:rPr>
+              <a:t>FastAPI dependency get_current_user() decodes JWT, checks role against endpoint requirements.</a:t>
+            </a:r>
+          </a:p>
+        </p:txBody>
+      </p:sp>
+      <p:sp>
+        <p:nvSpPr>
+          <p:cNvPr id="15" name="TextBox 14"/>
+          <p:cNvSpPr txBox="1"/>
+          <p:nvPr/>
+        </p:nvSpPr>
+        <p:spPr>
+          <a:xfrm>
+            <a:off x="640080" y="4069080"/>
+            <a:ext cx="1828800" cy="320040"/>
+          </a:xfrm>
+          <a:prstGeom prst="rect">
+            <a:avLst/>
+          </a:prstGeom>
+          <a:noFill/>
+        </p:spPr>
+        <p:txBody>
+          <a:bodyPr wrap="square">
+            <a:spAutoFit/>
+          </a:bodyPr>
+          <a:lstStyle/>
+          <a:p>
+            <a:pPr algn="l"/>
+            <a:r>
+              <a:rPr sz="1000" b="1" i="0">
+                <a:solidFill>
+                  <a:srgbClr val="4AF0A0"/>
+                </a:solidFill>
+                <a:latin typeface="Segoe UI"/>
+              </a:rPr>
+              <a:t>Dashboard</a:t>
+            </a:r>
+          </a:p>
+        </p:txBody>
+      </p:sp>
+      <p:sp>
+        <p:nvSpPr>
+          <p:cNvPr id="16" name="TextBox 15"/>
+          <p:cNvSpPr txBox="1"/>
+          <p:nvPr/>
+        </p:nvSpPr>
+        <p:spPr>
+          <a:xfrm>
+            <a:off x="2514600" y="4069080"/>
+            <a:ext cx="3246120" cy="685800"/>
+          </a:xfrm>
+          <a:prstGeom prst="rect">
+            <a:avLst/>
+          </a:prstGeom>
+          <a:noFill/>
+        </p:spPr>
+        <p:txBody>
+          <a:bodyPr wrap="square">
+            <a:spAutoFit/>
+          </a:bodyPr>
+          <a:lstStyle/>
+          <a:p>
+            <a:pPr algn="l"/>
+            <a:r>
+              <a:rPr sz="1000" b="0" i="0">
+                <a:solidFill>
+                  <a:srgbClr val="8896A8"/>
+                </a:solidFill>
+                <a:latin typeface="Segoe UI"/>
+              </a:rPr>
+              <a:t>Streamlit sessions use HTTP-only cookie. Same SQLite DB, separate session state.</a:t>
+            </a:r>
+          </a:p>
+        </p:txBody>
+      </p:sp>
+      <p:sp>
+        <p:nvSpPr>
+          <p:cNvPr id="17" name="TextBox 16"/>
+          <p:cNvSpPr txBox="1"/>
+          <p:nvPr/>
+        </p:nvSpPr>
+        <p:spPr>
+          <a:xfrm>
+            <a:off x="640080" y="4892040"/>
+            <a:ext cx="1828800" cy="320040"/>
+          </a:xfrm>
+          <a:prstGeom prst="rect">
+            <a:avLst/>
+          </a:prstGeom>
+          <a:noFill/>
+        </p:spPr>
+        <p:txBody>
+          <a:bodyPr wrap="square">
+            <a:spAutoFit/>
+          </a:bodyPr>
+          <a:lstStyle/>
+          <a:p>
+            <a:pPr algn="l"/>
+            <a:r>
+              <a:rPr sz="1000" b="1" i="0">
+                <a:solidFill>
+                  <a:srgbClr val="4AF0A0"/>
+                </a:solidFill>
+                <a:latin typeface="Segoe UI"/>
+              </a:rPr>
+              <a:t>shared_db.py</a:t>
+            </a:r>
+          </a:p>
+        </p:txBody>
+      </p:sp>
+      <p:sp>
+        <p:nvSpPr>
+          <p:cNvPr id="18" name="TextBox 17"/>
+          <p:cNvSpPr txBox="1"/>
+          <p:nvPr/>
+        </p:nvSpPr>
+        <p:spPr>
+          <a:xfrm>
+            <a:off x="2514600" y="4892040"/>
+            <a:ext cx="3246120" cy="685800"/>
+          </a:xfrm>
+          <a:prstGeom prst="rect">
+            <a:avLst/>
+          </a:prstGeom>
+          <a:noFill/>
+        </p:spPr>
+        <p:txBody>
+          <a:bodyPr wrap="square">
+            <a:spAutoFit/>
+          </a:bodyPr>
+          <a:lstStyle/>
+          <a:p>
+            <a:pPr algn="l"/>
+            <a:r>
+              <a:rPr sz="1000" b="0" i="0">
+                <a:solidFill>
+                  <a:srgbClr val="8896A8"/>
+                </a:solidFill>
+                <a:latin typeface="Segoe UI"/>
+              </a:rPr>
+              <a:t>Bridge module that both the FastAPI backend and Streamlit dashboard import — ensures they write to the same SQLite file regardless of working directory.</a:t>
+            </a:r>
+          </a:p>
+        </p:txBody>
+      </p:sp>
+      <p:sp>
+        <p:nvSpPr>
+          <p:cNvPr id="19" name="Rectangle 18"/>
+          <p:cNvSpPr/>
+          <p:nvPr/>
+        </p:nvSpPr>
+        <p:spPr>
+          <a:xfrm>
+            <a:off x="6217920" y="1051560"/>
+            <a:ext cx="5394960" cy="5349240"/>
+          </a:xfrm>
+          <a:prstGeom prst="rect">
+            <a:avLst/>
+          </a:prstGeom>
+          <a:solidFill>
+            <a:srgbClr val="161A22"/>
+          </a:solidFill>
+          <a:ln>
+            <a:noFill/>
+          </a:ln>
+        </p:spPr>
+        <p:style>
+          <a:lnRef idx="1">
+            <a:schemeClr val="accent1"/>
+          </a:lnRef>
+          <a:fillRef idx="3">
+            <a:schemeClr val="accent1"/>
+          </a:fillRef>
+          <a:effectRef idx="2">
+            <a:schemeClr val="accent1"/>
+          </a:effectRef>
+          <a:fontRef idx="minor">
+            <a:schemeClr val="lt1"/>
+          </a:fontRef>
+        </p:style>
+        <p:txBody>
+          <a:bodyPr rtlCol="0" anchor="ctr"/>
+          <a:lstStyle/>
+          <a:p>
+            <a:pPr algn="ctr"/>
+          </a:p>
+        </p:txBody>
+      </p:sp>
+      <p:sp>
+        <p:nvSpPr>
+          <p:cNvPr id="20" name="Rectangle 19"/>
+          <p:cNvSpPr/>
+          <p:nvPr/>
+        </p:nvSpPr>
+        <p:spPr>
+          <a:xfrm>
+            <a:off x="6217920" y="1051560"/>
+            <a:ext cx="5394960" cy="54864"/>
+          </a:xfrm>
+          <a:prstGeom prst="rect">
+            <a:avLst/>
+          </a:prstGeom>
+          <a:solidFill>
+            <a:srgbClr val="4A9EF0"/>
+          </a:solidFill>
+          <a:ln>
+            <a:noFill/>
+          </a:ln>
+        </p:spPr>
+        <p:style>
+          <a:lnRef idx="1">
+            <a:schemeClr val="accent1"/>
+          </a:lnRef>
+          <a:fillRef idx="3">
+            <a:schemeClr val="accent1"/>
+          </a:fillRef>
+          <a:effectRef idx="2">
+            <a:schemeClr val="accent1"/>
+          </a:effectRef>
+          <a:fontRef idx="minor">
+            <a:schemeClr val="lt1"/>
+          </a:fontRef>
+        </p:style>
+        <p:txBody>
+          <a:bodyPr rtlCol="0" anchor="ctr"/>
+          <a:lstStyle/>
+          <a:p>
+            <a:pPr algn="ctr"/>
+          </a:p>
+        </p:txBody>
+      </p:sp>
+      <p:sp>
+        <p:nvSpPr>
+          <p:cNvPr id="21" name="TextBox 20"/>
+          <p:cNvSpPr txBox="1"/>
+          <p:nvPr/>
+        </p:nvSpPr>
+        <p:spPr>
+          <a:xfrm>
+            <a:off x="6400800" y="1170432"/>
+            <a:ext cx="5029200" cy="384048"/>
+          </a:xfrm>
+          <a:prstGeom prst="rect">
+            <a:avLst/>
+          </a:prstGeom>
+          <a:noFill/>
+        </p:spPr>
+        <p:txBody>
+          <a:bodyPr wrap="square">
+            <a:spAutoFit/>
+          </a:bodyPr>
+          <a:lstStyle/>
+          <a:p>
+            <a:pPr algn="l"/>
+            <a:r>
+              <a:rPr sz="1400" b="1" i="0">
+                <a:solidFill>
+                  <a:srgbClr val="FFFFFF"/>
+                </a:solidFill>
+                <a:latin typeface="Segoe UI"/>
+              </a:rPr>
+              <a:t>Deployment</a:t>
+            </a:r>
+          </a:p>
+        </p:txBody>
+      </p:sp>
+      <p:sp>
+        <p:nvSpPr>
+          <p:cNvPr id="22" name="TextBox 21"/>
+          <p:cNvSpPr txBox="1"/>
+          <p:nvPr/>
+        </p:nvSpPr>
+        <p:spPr>
+          <a:xfrm>
+            <a:off x="6400800" y="1600200"/>
+            <a:ext cx="1828800" cy="320040"/>
+          </a:xfrm>
+          <a:prstGeom prst="rect">
+            <a:avLst/>
+          </a:prstGeom>
+          <a:noFill/>
+        </p:spPr>
+        <p:txBody>
+          <a:bodyPr wrap="square">
+            <a:spAutoFit/>
+          </a:bodyPr>
+          <a:lstStyle/>
+          <a:p>
+            <a:pPr algn="l"/>
+            <a:r>
+              <a:rPr sz="1000" b="1" i="0">
+                <a:solidFill>
+                  <a:srgbClr val="4A9EF0"/>
+                </a:solidFill>
+                <a:latin typeface="Segoe UI"/>
+              </a:rPr>
+              <a:t>QC Engine</a:t>
+            </a:r>
+          </a:p>
+        </p:txBody>
+      </p:sp>
+      <p:sp>
+        <p:nvSpPr>
+          <p:cNvPr id="23" name="TextBox 22"/>
+          <p:cNvSpPr txBox="1"/>
+          <p:nvPr/>
+        </p:nvSpPr>
+        <p:spPr>
+          <a:xfrm>
+            <a:off x="8275320" y="1600200"/>
+            <a:ext cx="3200400" cy="685800"/>
+          </a:xfrm>
+          <a:prstGeom prst="rect">
+            <a:avLst/>
+          </a:prstGeom>
+          <a:noFill/>
+        </p:spPr>
+        <p:txBody>
+          <a:bodyPr wrap="square">
+            <a:spAutoFit/>
+          </a:bodyPr>
+          <a:lstStyle/>
+          <a:p>
+            <a:pPr algn="l"/>
+            <a:r>
+              <a:rPr sz="1000" b="0" i="0">
+                <a:solidFill>
+                  <a:srgbClr val="8896A8"/>
+                </a:solidFill>
+                <a:latin typeface="Segoe UI"/>
+              </a:rPr>
+              <a:t>Render.com — servalab.render.com
+FastAPI backend, React static bundle via Vite build</a:t>
+            </a:r>
+          </a:p>
+        </p:txBody>
+      </p:sp>
+      <p:sp>
+        <p:nvSpPr>
+          <p:cNvPr id="24" name="TextBox 23"/>
+          <p:cNvSpPr txBox="1"/>
+          <p:nvPr/>
+        </p:nvSpPr>
+        <p:spPr>
+          <a:xfrm>
+            <a:off x="6400800" y="2423160"/>
+            <a:ext cx="1828800" cy="320040"/>
+          </a:xfrm>
+          <a:prstGeom prst="rect">
+            <a:avLst/>
+          </a:prstGeom>
+          <a:noFill/>
+        </p:spPr>
+        <p:txBody>
+          <a:bodyPr wrap="square">
+            <a:spAutoFit/>
+          </a:bodyPr>
+          <a:lstStyle/>
+          <a:p>
+            <a:pPr algn="l"/>
+            <a:r>
+              <a:rPr sz="1000" b="1" i="0">
+                <a:solidFill>
+                  <a:srgbClr val="4A9EF0"/>
+                </a:solidFill>
+                <a:latin typeface="Segoe UI"/>
+              </a:rPr>
+              <a:t>Dashboard</a:t>
+            </a:r>
+          </a:p>
+        </p:txBody>
+      </p:sp>
+      <p:sp>
+        <p:nvSpPr>
+          <p:cNvPr id="25" name="TextBox 24"/>
+          <p:cNvSpPr txBox="1"/>
+          <p:nvPr/>
+        </p:nvSpPr>
+        <p:spPr>
+          <a:xfrm>
+            <a:off x="8275320" y="2423160"/>
+            <a:ext cx="3200400" cy="685800"/>
+          </a:xfrm>
+          <a:prstGeom prst="rect">
+            <a:avLst/>
+          </a:prstGeom>
+          <a:noFill/>
+        </p:spPr>
+        <p:txBody>
+          <a:bodyPr wrap="square">
+            <a:spAutoFit/>
+          </a:bodyPr>
+          <a:lstStyle/>
+          <a:p>
+            <a:pPr algn="l"/>
+            <a:r>
+              <a:rPr sz="1000" b="0" i="0">
+                <a:solidFill>
+                  <a:srgbClr val="8896A8"/>
+                </a:solidFill>
+                <a:latin typeface="Segoe UI"/>
+              </a:rPr>
+              <a:t>Fly.io — dashboard.servallab.com
+dashboard/fly.toml configures app name, region, machine size</a:t>
+            </a:r>
+          </a:p>
+        </p:txBody>
+      </p:sp>
+      <p:sp>
+        <p:nvSpPr>
+          <p:cNvPr id="26" name="TextBox 25"/>
+          <p:cNvSpPr txBox="1"/>
+          <p:nvPr/>
+        </p:nvSpPr>
+        <p:spPr>
+          <a:xfrm>
+            <a:off x="6400800" y="3246120"/>
+            <a:ext cx="1828800" cy="320040"/>
+          </a:xfrm>
+          <a:prstGeom prst="rect">
+            <a:avLst/>
+          </a:prstGeom>
+          <a:noFill/>
+        </p:spPr>
+        <p:txBody>
+          <a:bodyPr wrap="square">
+            <a:spAutoFit/>
+          </a:bodyPr>
+          <a:lstStyle/>
+          <a:p>
+            <a:pPr algn="l"/>
+            <a:r>
+              <a:rPr sz="1000" b="1" i="0">
+                <a:solidFill>
+                  <a:srgbClr val="4A9EF0"/>
+                </a:solidFill>
+                <a:latin typeface="Segoe UI"/>
+              </a:rPr>
+              <a:t>Database</a:t>
+            </a:r>
+          </a:p>
+        </p:txBody>
+      </p:sp>
+      <p:sp>
+        <p:nvSpPr>
+          <p:cNvPr id="27" name="TextBox 26"/>
+          <p:cNvSpPr txBox="1"/>
+          <p:nvPr/>
+        </p:nvSpPr>
+        <p:spPr>
+          <a:xfrm>
+            <a:off x="8275320" y="3246120"/>
+            <a:ext cx="3200400" cy="685800"/>
+          </a:xfrm>
+          <a:prstGeom prst="rect">
+            <a:avLst/>
+          </a:prstGeom>
+          <a:noFill/>
+        </p:spPr>
+        <p:txBody>
+          <a:bodyPr wrap="square">
+            <a:spAutoFit/>
+          </a:bodyPr>
+          <a:lstStyle/>
+          <a:p>
+            <a:pPr algn="l"/>
+            <a:r>
+              <a:rPr sz="1000" b="0" i="0">
+                <a:solidFill>
+                  <a:srgbClr val="8896A8"/>
+                </a:solidFill>
+                <a:latin typeface="Segoe UI"/>
+              </a:rPr>
+              <a:t>SQLite persisted on Fly.io volume mount.
+Not shared across instances — single-region deployment.</a:t>
+            </a:r>
+          </a:p>
+        </p:txBody>
+      </p:sp>
+      <p:sp>
+        <p:nvSpPr>
+          <p:cNvPr id="28" name="TextBox 27"/>
+          <p:cNvSpPr txBox="1"/>
+          <p:nvPr/>
+        </p:nvSpPr>
+        <p:spPr>
+          <a:xfrm>
+            <a:off x="6400800" y="4069080"/>
+            <a:ext cx="1828800" cy="320040"/>
+          </a:xfrm>
+          <a:prstGeom prst="rect">
+            <a:avLst/>
+          </a:prstGeom>
+          <a:noFill/>
+        </p:spPr>
+        <p:txBody>
+          <a:bodyPr wrap="square">
+            <a:spAutoFit/>
+          </a:bodyPr>
+          <a:lstStyle/>
+          <a:p>
+            <a:pPr algn="l"/>
+            <a:r>
+              <a:rPr sz="1000" b="1" i="0">
+                <a:solidFill>
+                  <a:srgbClr val="4A9EF0"/>
+                </a:solidFill>
+                <a:latin typeface="Segoe UI"/>
+              </a:rPr>
+              <a:t>CI/CD</a:t>
+            </a:r>
+          </a:p>
+        </p:txBody>
+      </p:sp>
+      <p:sp>
+        <p:nvSpPr>
+          <p:cNvPr id="29" name="TextBox 28"/>
+          <p:cNvSpPr txBox="1"/>
+          <p:nvPr/>
+        </p:nvSpPr>
+        <p:spPr>
+          <a:xfrm>
+            <a:off x="8275320" y="4069080"/>
+            <a:ext cx="3200400" cy="685800"/>
+          </a:xfrm>
+          <a:prstGeom prst="rect">
+            <a:avLst/>
+          </a:prstGeom>
+          <a:noFill/>
+        </p:spPr>
+        <p:txBody>
+          <a:bodyPr wrap="square">
+            <a:spAutoFit/>
+          </a:bodyPr>
+          <a:lstStyle/>
+          <a:p>
+            <a:pPr algn="l"/>
+            <a:r>
+              <a:rPr sz="1000" b="0" i="0">
+                <a:solidFill>
+                  <a:srgbClr val="8896A8"/>
+                </a:solidFill>
+                <a:latin typeface="Segoe UI"/>
+              </a:rPr>
+              <a:t>Manual deploy: fly deploy (dashboard) and Render auto-deploy on push to main.</a:t>
+            </a:r>
+          </a:p>
+        </p:txBody>
+      </p:sp>
+      <p:sp>
+        <p:nvSpPr>
+          <p:cNvPr id="30" name="TextBox 29"/>
+          <p:cNvSpPr txBox="1"/>
+          <p:nvPr/>
+        </p:nvSpPr>
+        <p:spPr>
+          <a:xfrm>
+            <a:off x="6400800" y="4892040"/>
+            <a:ext cx="1828800" cy="320040"/>
+          </a:xfrm>
+          <a:prstGeom prst="rect">
+            <a:avLst/>
+          </a:prstGeom>
+          <a:noFill/>
+        </p:spPr>
+        <p:txBody>
+          <a:bodyPr wrap="square">
+            <a:spAutoFit/>
+          </a:bodyPr>
+          <a:lstStyle/>
+          <a:p>
+            <a:pPr algn="l"/>
+            <a:r>
+              <a:rPr sz="1000" b="1" i="0">
+                <a:solidFill>
+                  <a:srgbClr val="4A9EF0"/>
+                </a:solidFill>
+                <a:latin typeface="Segoe UI"/>
+              </a:rPr>
+              <a:t>Env vars</a:t>
+            </a:r>
+          </a:p>
+        </p:txBody>
+      </p:sp>
+      <p:sp>
+        <p:nvSpPr>
+          <p:cNvPr id="31" name="TextBox 30"/>
+          <p:cNvSpPr txBox="1"/>
+          <p:nvPr/>
+        </p:nvSpPr>
+        <p:spPr>
+          <a:xfrm>
+            <a:off x="8275320" y="4892040"/>
+            <a:ext cx="3200400" cy="685800"/>
+          </a:xfrm>
+          <a:prstGeom prst="rect">
+            <a:avLst/>
+          </a:prstGeom>
+          <a:noFill/>
+        </p:spPr>
+        <p:txBody>
+          <a:bodyPr wrap="square">
+            <a:spAutoFit/>
+          </a:bodyPr>
+          <a:lstStyle/>
+          <a:p>
+            <a:pPr algn="l"/>
+            <a:r>
+              <a:rPr sz="1000" b="0" i="0">
+                <a:solidFill>
+                  <a:srgbClr val="8896A8"/>
+                </a:solidFill>
+                <a:latin typeface="Segoe UI"/>
+              </a:rPr>
+              <a:t>VITE_API_URL → FastAPI URL
+SECRET_KEY → JWT signing key
+GROQ_API_KEY → AI verbatim check</a:t>
+            </a:r>
+          </a:p>
+        </p:txBody>
+      </p:sp>
+    </p:spTree>
+  </p:cSld>
+  <p:clrMapOvr>
+    <a:masterClrMapping/>
+  </p:clrMapOvr>
+</p:sld>
+</file>
+
+<file path=ppt/slides/slide23.xml><?xml version="1.0" encoding="utf-8"?>
+<p:sld xmlns:a="http://schemas.openxmlformats.org/drawingml/2006/main" xmlns:p="http://schemas.openxmlformats.org/presentationml/2006/main" xmlns:r="http://schemas.openxmlformats.org/officeDocument/2006/relationships">
+  <p:cSld>
+    <p:bg>
+      <p:bgPr>
+        <a:solidFill>
+          <a:srgbClr val="0E1014"/>
+        </a:solidFill>
+        <a:effectLst/>
+      </p:bgPr>
+    </p:bg>
+    <p:spTree>
+      <p:nvGrpSpPr>
+        <p:cNvPr id="1" name=""/>
+        <p:cNvGrpSpPr/>
+        <p:nvPr/>
+      </p:nvGrpSpPr>
+      <p:grpSpPr/>
+      <p:sp>
+        <p:nvSpPr>
+          <p:cNvPr id="2" name="Rectangle 1"/>
+          <p:cNvSpPr/>
+          <p:nvPr/>
+        </p:nvSpPr>
+        <p:spPr>
+          <a:xfrm>
+            <a:off x="0" y="0"/>
+            <a:ext cx="12188952" cy="73152"/>
+          </a:xfrm>
+          <a:prstGeom prst="rect">
+            <a:avLst/>
+          </a:prstGeom>
+          <a:solidFill>
+            <a:srgbClr val="4AF0A0"/>
+          </a:solidFill>
+          <a:ln>
+            <a:noFill/>
+          </a:ln>
+        </p:spPr>
+        <p:style>
+          <a:lnRef idx="1">
+            <a:schemeClr val="accent1"/>
+          </a:lnRef>
+          <a:fillRef idx="3">
+            <a:schemeClr val="accent1"/>
+          </a:fillRef>
+          <a:effectRef idx="2">
+            <a:schemeClr val="accent1"/>
+          </a:effectRef>
+          <a:fontRef idx="minor">
+            <a:schemeClr val="lt1"/>
+          </a:fontRef>
+        </p:style>
+        <p:txBody>
+          <a:bodyPr rtlCol="0" anchor="ctr"/>
+          <a:lstStyle/>
+          <a:p>
+            <a:pPr algn="ctr"/>
+          </a:p>
+        </p:txBody>
+      </p:sp>
+      <p:sp>
+        <p:nvSpPr>
+          <p:cNvPr id="3" name="Rectangle 2"/>
+          <p:cNvSpPr/>
+          <p:nvPr/>
+        </p:nvSpPr>
+        <p:spPr>
+          <a:xfrm>
+            <a:off x="0" y="6784848"/>
+            <a:ext cx="12188952" cy="73152"/>
+          </a:xfrm>
+          <a:prstGeom prst="rect">
+            <a:avLst/>
+          </a:prstGeom>
+          <a:solidFill>
+            <a:srgbClr val="4AF0A0"/>
+          </a:solidFill>
+          <a:ln>
+            <a:noFill/>
+          </a:ln>
+        </p:spPr>
+        <p:style>
+          <a:lnRef idx="1">
+            <a:schemeClr val="accent1"/>
+          </a:lnRef>
+          <a:fillRef idx="3">
+            <a:schemeClr val="accent1"/>
+          </a:fillRef>
+          <a:effectRef idx="2">
+            <a:schemeClr val="accent1"/>
+          </a:effectRef>
+          <a:fontRef idx="minor">
+            <a:schemeClr val="lt1"/>
+          </a:fontRef>
+        </p:style>
+        <p:txBody>
+          <a:bodyPr rtlCol="0" anchor="ctr"/>
+          <a:lstStyle/>
+          <a:p>
+            <a:pPr algn="ctr"/>
+          </a:p>
+        </p:txBody>
+      </p:sp>
+      <p:sp>
+        <p:nvSpPr>
+          <p:cNvPr id="4" name="TextBox 3"/>
+          <p:cNvSpPr txBox="1"/>
+          <p:nvPr/>
+        </p:nvSpPr>
+        <p:spPr>
+          <a:xfrm>
+            <a:off x="548640" y="1737360"/>
+            <a:ext cx="10972800" cy="658368"/>
+          </a:xfrm>
+          <a:prstGeom prst="rect">
+            <a:avLst/>
+          </a:prstGeom>
+          <a:noFill/>
+        </p:spPr>
+        <p:txBody>
+          <a:bodyPr wrap="square">
+            <a:spAutoFit/>
+          </a:bodyPr>
+          <a:lstStyle/>
+          <a:p>
+            <a:pPr algn="ctr"/>
+            <a:r>
+              <a:rPr sz="4000" b="1" i="0">
+                <a:solidFill>
+                  <a:srgbClr val="FFFFFF"/>
+                </a:solidFill>
+                <a:latin typeface="Segoe UI"/>
+              </a:rPr>
+              <a:t>Servallab QC Engine</a:t>
+            </a:r>
+          </a:p>
+        </p:txBody>
+      </p:sp>
+      <p:sp>
+        <p:nvSpPr>
+          <p:cNvPr id="5" name="TextBox 4"/>
+          <p:cNvSpPr txBox="1"/>
+          <p:nvPr/>
+        </p:nvSpPr>
+        <p:spPr>
+          <a:xfrm>
+            <a:off x="548640" y="2450592"/>
+            <a:ext cx="10972800" cy="475488"/>
+          </a:xfrm>
+          <a:prstGeom prst="rect">
+            <a:avLst/>
+          </a:prstGeom>
+          <a:noFill/>
+        </p:spPr>
+        <p:txBody>
+          <a:bodyPr wrap="square">
+            <a:spAutoFit/>
+          </a:bodyPr>
+          <a:lstStyle/>
+          <a:p>
+            <a:pPr algn="ctr"/>
+            <a:r>
+              <a:rPr sz="2000" b="0" i="0">
+                <a:solidFill>
+                  <a:srgbClr val="4AF0A0"/>
+                </a:solidFill>
+                <a:latin typeface="Segoe UI"/>
+              </a:rPr>
+              <a:t>Technical Reference Complete</a:t>
+            </a:r>
+          </a:p>
+        </p:txBody>
+      </p:sp>
+      <p:sp>
+        <p:nvSpPr>
+          <p:cNvPr id="6" name="Rectangle 5"/>
+          <p:cNvSpPr/>
+          <p:nvPr/>
+        </p:nvSpPr>
+        <p:spPr>
+          <a:xfrm>
+            <a:off x="3200400" y="3090672"/>
+            <a:ext cx="5788152" cy="18288"/>
+          </a:xfrm>
+          <a:prstGeom prst="rect">
+            <a:avLst/>
+          </a:prstGeom>
+          <a:solidFill>
+            <a:srgbClr val="161A22"/>
+          </a:solidFill>
+          <a:ln>
+            <a:noFill/>
+          </a:ln>
+        </p:spPr>
+        <p:style>
+          <a:lnRef idx="1">
+            <a:schemeClr val="accent1"/>
+          </a:lnRef>
+          <a:fillRef idx="3">
+            <a:schemeClr val="accent1"/>
+          </a:fillRef>
+          <a:effectRef idx="2">
+            <a:schemeClr val="accent1"/>
+          </a:effectRef>
+          <a:fontRef idx="minor">
+            <a:schemeClr val="lt1"/>
+          </a:fontRef>
+        </p:style>
+        <p:txBody>
+          <a:bodyPr rtlCol="0" anchor="ctr"/>
+          <a:lstStyle/>
+          <a:p>
+            <a:pPr algn="ctr"/>
+          </a:p>
+        </p:txBody>
+      </p:sp>
+      <p:sp>
+        <p:nvSpPr>
           <p:cNvPr id="7" name="TextBox 6"/>
           <p:cNvSpPr txBox="1"/>
           <p:nvPr/>
@@ -17688,6 +22558,41 @@
       <p:sp>
         <p:nvSpPr>
           <p:cNvPr id="12" name="TextBox 11"/>
+          <p:cNvSpPr txBox="1"/>
+          <p:nvPr/>
+        </p:nvSpPr>
+        <p:spPr>
+          <a:xfrm>
+            <a:off x="2286000" y="5687568"/>
+            <a:ext cx="7616952" cy="384048"/>
+          </a:xfrm>
+          <a:prstGeom prst="rect">
+            <a:avLst/>
+          </a:prstGeom>
+          <a:noFill/>
+        </p:spPr>
+        <p:txBody>
+          <a:bodyPr wrap="square">
+            <a:spAutoFit/>
+          </a:bodyPr>
+          <a:lstStyle/>
+          <a:p>
+            <a:pPr algn="ctr"/>
+            <a:r>
+              <a:rPr sz="1300" b="0" i="0">
+                <a:solidFill>
+                  <a:srgbClr val="8896A8"/>
+                </a:solidFill>
+                <a:latin typeface="Segoe UI"/>
+              </a:rPr>
+              <a:t>▸  Manager dashboard — multi-project tracking at dashboard.servallab.com</a:t>
+            </a:r>
+          </a:p>
+        </p:txBody>
+      </p:sp>
+      <p:sp>
+        <p:nvSpPr>
+          <p:cNvPr id="13" name="TextBox 12"/>
           <p:cNvSpPr txBox="1"/>
           <p:nvPr/>
         </p:nvSpPr>
